--- a/lotform/TPM_1_Reinicio_Rapido.pptx
+++ b/lotform/TPM_1_Reinicio_Rapido.pptx
@@ -2388,7 +2388,7 @@
                 <a:latin typeface="LG스마트체 Regular" panose="020B0600000101010101" pitchFamily="50" charset="-127"/>
                 <a:ea typeface="LG스마트체 Regular" panose="020B0600000101010101" pitchFamily="50" charset="-127"/>
               </a:rPr>
-              <a:t>Install PCB, Fastening 1/3/4, AVI, Top Unloader and Top Cover</a:t>
+              <a:t>Line 2 · Install PCB, Fastening 1/3/4, AVI, Top Unloader and Top Cover</a:t>
             </a:r>
             <a:endParaRPr kumimoji="0" lang="en-US" altLang="ko-KR" sz="1600" b="1" i="0" strike="noStrike" kern="1200" cap="none" spc="0" normalizeH="0" baseline="0" noProof="0" dirty="0">
               <a:ln>
@@ -3173,7 +3173,7 @@
             </a:pPr>
             <a:r>
               <a:rPr lang="en-US" altLang="ko-KR" dirty="0" sz="1000"/>
-              <a:t>Restart after a stop: 2.5-3 min → 10-15 s (-90%+) on 7 stations.</a:t>
+              <a:t>Restart after a stop: 2.5-3 min → 10-15 s on each of the 7 stations.</a:t>
             </a:r>
           </a:p>
         </p:txBody>
@@ -8150,7 +8150,7 @@
         </p:nvSpPr>
         <p:spPr bwMode="auto">
           <a:xfrm>
-            <a:off x="7132320" y="4206240"/>
+            <a:off x="7132320" y="4224528"/>
             <a:ext cx="2633472" cy="1463040"/>
           </a:xfrm>
           <a:prstGeom prst="rect">
@@ -8293,7 +8293,7 @@
             </a:pPr>
             <a:r>
               <a:rPr lang="en-US" altLang="ko-KR" dirty="0" sz="900"/>
-              <a:t>2 Oct: 20,127 pcs (+20.7% vs 12 Aug) with no stop hours.</a:t>
+              <a:t>Machine time recovered on every stop, on every station of the camera line.</a:t>
             </a:r>
           </a:p>
           <a:p>
@@ -8306,7 +8306,7 @@
             </a:pPr>
             <a:r>
               <a:rPr lang="en-US" altLang="ko-KR" dirty="0" sz="900"/>
-              <a:t>1 Oct: controlled material run (17,449 pcs), yet the best hour of all: 1,003 pcs.</a:t>
+              <a:t>Same vendor initialization path: modules, MES handshake and pallet dialog behave as before.</a:t>
             </a:r>
           </a:p>
           <a:p>
@@ -8396,1533 +8396,6 @@
           </a:p>
         </p:txBody>
       </p:sp>
-      <p:graphicFrame>
-        <p:nvGraphicFramePr>
-          <p:cNvPr id="301" name="Production results table"/>
-          <p:cNvGraphicFramePr>
-            <a:graphicFrameLocks noGrp="1"/>
-          </p:cNvGraphicFramePr>
-          <p:nvPr/>
-        </p:nvGraphicFramePr>
-        <p:xfrm>
-          <a:off x="7187184" y="2907792"/>
-          <a:ext cx="2578608" cy="1216152"/>
-        </p:xfrm>
-        <a:graphic>
-          <a:graphicData uri="http://schemas.openxmlformats.org/drawingml/2006/table">
-            <a:tbl>
-              <a:tblPr firstRow="1"/>
-              <a:tblGrid>
-                <a:gridCol w="804672"/>
-                <a:gridCol w="429768"/>
-                <a:gridCol w="429768"/>
-                <a:gridCol w="457200"/>
-                <a:gridCol w="457200"/>
-              </a:tblGrid>
-              <a:tr h="173736">
-                <a:tc>
-                  <a:txBody>
-                    <a:bodyPr/>
-                    <a:lstStyle/>
-                    <a:p>
-                      <a:pPr algn="ctr"/>
-                      <a:r>
-                        <a:rPr lang="en-US" altLang="ko-KR" dirty="0" sz="700" b="1">
-                          <a:solidFill>
-                            <a:srgbClr val="FFFFFF"/>
-                          </a:solidFill>
-                          <a:latin typeface="Arial"/>
-                          <a:cs typeface="Arial"/>
-                        </a:rPr>
-                        <a:t>Line 1 (pcs)</a:t>
-                      </a:r>
-                    </a:p>
-                  </a:txBody>
-                  <a:tcPr marL="27432" marR="27432" marT="18288" marB="18288" anchor="ctr">
-                    <a:lnL w="6350">
-                      <a:solidFill>
-                        <a:srgbClr val="BFBFBF"/>
-                      </a:solidFill>
-                    </a:lnL>
-                    <a:lnR w="6350">
-                      <a:solidFill>
-                        <a:srgbClr val="BFBFBF"/>
-                      </a:solidFill>
-                    </a:lnR>
-                    <a:lnT w="6350">
-                      <a:solidFill>
-                        <a:srgbClr val="BFBFBF"/>
-                      </a:solidFill>
-                    </a:lnT>
-                    <a:lnB w="6350">
-                      <a:solidFill>
-                        <a:srgbClr val="BFBFBF"/>
-                      </a:solidFill>
-                    </a:lnB>
-                    <a:solidFill>
-                      <a:srgbClr val="595959"/>
-                    </a:solidFill>
-                  </a:tcPr>
-                </a:tc>
-                <a:tc>
-                  <a:txBody>
-                    <a:bodyPr/>
-                    <a:lstStyle/>
-                    <a:p>
-                      <a:pPr algn="ctr"/>
-                      <a:r>
-                        <a:rPr lang="en-US" altLang="ko-KR" dirty="0" sz="700" b="1">
-                          <a:solidFill>
-                            <a:srgbClr val="FFFFFF"/>
-                          </a:solidFill>
-                          <a:latin typeface="Arial"/>
-                          <a:cs typeface="Arial"/>
-                        </a:rPr>
-                        <a:t>12 Aug</a:t>
-                      </a:r>
-                    </a:p>
-                  </a:txBody>
-                  <a:tcPr marL="27432" marR="27432" marT="18288" marB="18288" anchor="ctr">
-                    <a:lnL w="6350">
-                      <a:solidFill>
-                        <a:srgbClr val="BFBFBF"/>
-                      </a:solidFill>
-                    </a:lnL>
-                    <a:lnR w="6350">
-                      <a:solidFill>
-                        <a:srgbClr val="BFBFBF"/>
-                      </a:solidFill>
-                    </a:lnR>
-                    <a:lnT w="6350">
-                      <a:solidFill>
-                        <a:srgbClr val="BFBFBF"/>
-                      </a:solidFill>
-                    </a:lnT>
-                    <a:lnB w="6350">
-                      <a:solidFill>
-                        <a:srgbClr val="BFBFBF"/>
-                      </a:solidFill>
-                    </a:lnB>
-                    <a:solidFill>
-                      <a:srgbClr val="595959"/>
-                    </a:solidFill>
-                  </a:tcPr>
-                </a:tc>
-                <a:tc>
-                  <a:txBody>
-                    <a:bodyPr/>
-                    <a:lstStyle/>
-                    <a:p>
-                      <a:pPr algn="ctr"/>
-                      <a:r>
-                        <a:rPr lang="en-US" altLang="ko-KR" dirty="0" sz="700" b="1">
-                          <a:solidFill>
-                            <a:srgbClr val="FFFFFF"/>
-                          </a:solidFill>
-                          <a:latin typeface="Arial"/>
-                          <a:cs typeface="Arial"/>
-                        </a:rPr>
-                        <a:t>1 Oct</a:t>
-                      </a:r>
-                    </a:p>
-                  </a:txBody>
-                  <a:tcPr marL="27432" marR="27432" marT="18288" marB="18288" anchor="ctr">
-                    <a:lnL w="6350">
-                      <a:solidFill>
-                        <a:srgbClr val="BFBFBF"/>
-                      </a:solidFill>
-                    </a:lnL>
-                    <a:lnR w="6350">
-                      <a:solidFill>
-                        <a:srgbClr val="BFBFBF"/>
-                      </a:solidFill>
-                    </a:lnR>
-                    <a:lnT w="6350">
-                      <a:solidFill>
-                        <a:srgbClr val="BFBFBF"/>
-                      </a:solidFill>
-                    </a:lnT>
-                    <a:lnB w="6350">
-                      <a:solidFill>
-                        <a:srgbClr val="BFBFBF"/>
-                      </a:solidFill>
-                    </a:lnB>
-                    <a:solidFill>
-                      <a:srgbClr val="595959"/>
-                    </a:solidFill>
-                  </a:tcPr>
-                </a:tc>
-                <a:tc>
-                  <a:txBody>
-                    <a:bodyPr/>
-                    <a:lstStyle/>
-                    <a:p>
-                      <a:pPr algn="ctr"/>
-                      <a:r>
-                        <a:rPr lang="en-US" altLang="ko-KR" dirty="0" sz="700" b="1">
-                          <a:solidFill>
-                            <a:srgbClr val="FFFFFF"/>
-                          </a:solidFill>
-                          <a:latin typeface="Arial"/>
-                          <a:cs typeface="Arial"/>
-                        </a:rPr>
-                        <a:t>2 Oct</a:t>
-                      </a:r>
-                    </a:p>
-                  </a:txBody>
-                  <a:tcPr marL="27432" marR="27432" marT="18288" marB="18288" anchor="ctr">
-                    <a:lnL w="6350">
-                      <a:solidFill>
-                        <a:srgbClr val="BFBFBF"/>
-                      </a:solidFill>
-                    </a:lnL>
-                    <a:lnR w="6350">
-                      <a:solidFill>
-                        <a:srgbClr val="BFBFBF"/>
-                      </a:solidFill>
-                    </a:lnR>
-                    <a:lnT w="6350">
-                      <a:solidFill>
-                        <a:srgbClr val="BFBFBF"/>
-                      </a:solidFill>
-                    </a:lnT>
-                    <a:lnB w="6350">
-                      <a:solidFill>
-                        <a:srgbClr val="BFBFBF"/>
-                      </a:solidFill>
-                    </a:lnB>
-                    <a:solidFill>
-                      <a:srgbClr val="595959"/>
-                    </a:solidFill>
-                  </a:tcPr>
-                </a:tc>
-                <a:tc>
-                  <a:txBody>
-                    <a:bodyPr/>
-                    <a:lstStyle/>
-                    <a:p>
-                      <a:pPr algn="ctr"/>
-                      <a:r>
-                        <a:rPr lang="en-US" altLang="ko-KR" dirty="0" sz="700" b="1">
-                          <a:solidFill>
-                            <a:srgbClr val="FFFFFF"/>
-                          </a:solidFill>
-                          <a:latin typeface="Arial"/>
-                          <a:cs typeface="Arial"/>
-                        </a:rPr>
-                        <a:t>Δ</a:t>
-                      </a:r>
-                    </a:p>
-                  </a:txBody>
-                  <a:tcPr marL="27432" marR="27432" marT="18288" marB="18288" anchor="ctr">
-                    <a:lnL w="6350">
-                      <a:solidFill>
-                        <a:srgbClr val="BFBFBF"/>
-                      </a:solidFill>
-                    </a:lnL>
-                    <a:lnR w="6350">
-                      <a:solidFill>
-                        <a:srgbClr val="BFBFBF"/>
-                      </a:solidFill>
-                    </a:lnR>
-                    <a:lnT w="6350">
-                      <a:solidFill>
-                        <a:srgbClr val="BFBFBF"/>
-                      </a:solidFill>
-                    </a:lnT>
-                    <a:lnB w="6350">
-                      <a:solidFill>
-                        <a:srgbClr val="BFBFBF"/>
-                      </a:solidFill>
-                    </a:lnB>
-                    <a:solidFill>
-                      <a:srgbClr val="595959"/>
-                    </a:solidFill>
-                  </a:tcPr>
-                </a:tc>
-              </a:tr>
-              <a:tr h="173736">
-                <a:tc>
-                  <a:txBody>
-                    <a:bodyPr/>
-                    <a:lstStyle/>
-                    <a:p>
-                      <a:pPr algn="l"/>
-                      <a:r>
-                        <a:rPr lang="en-US" altLang="ko-KR" dirty="0" sz="700">
-                          <a:solidFill>
-                            <a:srgbClr val="262626"/>
-                          </a:solidFill>
-                          <a:latin typeface="Arial"/>
-                          <a:cs typeface="Arial"/>
-                        </a:rPr>
-                        <a:t>Output/day</a:t>
-                      </a:r>
-                    </a:p>
-                  </a:txBody>
-                  <a:tcPr marL="27432" marR="27432" marT="18288" marB="18288" anchor="ctr">
-                    <a:lnL w="6350">
-                      <a:solidFill>
-                        <a:srgbClr val="BFBFBF"/>
-                      </a:solidFill>
-                    </a:lnL>
-                    <a:lnR w="6350">
-                      <a:solidFill>
-                        <a:srgbClr val="BFBFBF"/>
-                      </a:solidFill>
-                    </a:lnR>
-                    <a:lnT w="6350">
-                      <a:solidFill>
-                        <a:srgbClr val="BFBFBF"/>
-                      </a:solidFill>
-                    </a:lnT>
-                    <a:lnB w="6350">
-                      <a:solidFill>
-                        <a:srgbClr val="BFBFBF"/>
-                      </a:solidFill>
-                    </a:lnB>
-                    <a:solidFill>
-                      <a:srgbClr val="F2F2F2"/>
-                    </a:solidFill>
-                  </a:tcPr>
-                </a:tc>
-                <a:tc>
-                  <a:txBody>
-                    <a:bodyPr/>
-                    <a:lstStyle/>
-                    <a:p>
-                      <a:pPr algn="ctr"/>
-                      <a:r>
-                        <a:rPr lang="en-US" altLang="ko-KR" dirty="0" sz="700">
-                          <a:solidFill>
-                            <a:srgbClr val="262626"/>
-                          </a:solidFill>
-                          <a:latin typeface="Arial"/>
-                          <a:cs typeface="Arial"/>
-                        </a:rPr>
-                        <a:t>16,678</a:t>
-                      </a:r>
-                    </a:p>
-                  </a:txBody>
-                  <a:tcPr marL="27432" marR="27432" marT="18288" marB="18288" anchor="ctr">
-                    <a:lnL w="6350">
-                      <a:solidFill>
-                        <a:srgbClr val="BFBFBF"/>
-                      </a:solidFill>
-                    </a:lnL>
-                    <a:lnR w="6350">
-                      <a:solidFill>
-                        <a:srgbClr val="BFBFBF"/>
-                      </a:solidFill>
-                    </a:lnR>
-                    <a:lnT w="6350">
-                      <a:solidFill>
-                        <a:srgbClr val="BFBFBF"/>
-                      </a:solidFill>
-                    </a:lnT>
-                    <a:lnB w="6350">
-                      <a:solidFill>
-                        <a:srgbClr val="BFBFBF"/>
-                      </a:solidFill>
-                    </a:lnB>
-                  </a:tcPr>
-                </a:tc>
-                <a:tc>
-                  <a:txBody>
-                    <a:bodyPr/>
-                    <a:lstStyle/>
-                    <a:p>
-                      <a:pPr algn="ctr"/>
-                      <a:r>
-                        <a:rPr lang="en-US" altLang="ko-KR" dirty="0" sz="700">
-                          <a:solidFill>
-                            <a:srgbClr val="262626"/>
-                          </a:solidFill>
-                          <a:latin typeface="Arial"/>
-                          <a:cs typeface="Arial"/>
-                        </a:rPr>
-                        <a:t>17,449</a:t>
-                      </a:r>
-                    </a:p>
-                  </a:txBody>
-                  <a:tcPr marL="27432" marR="27432" marT="18288" marB="18288" anchor="ctr">
-                    <a:lnL w="6350">
-                      <a:solidFill>
-                        <a:srgbClr val="BFBFBF"/>
-                      </a:solidFill>
-                    </a:lnL>
-                    <a:lnR w="6350">
-                      <a:solidFill>
-                        <a:srgbClr val="BFBFBF"/>
-                      </a:solidFill>
-                    </a:lnR>
-                    <a:lnT w="6350">
-                      <a:solidFill>
-                        <a:srgbClr val="BFBFBF"/>
-                      </a:solidFill>
-                    </a:lnT>
-                    <a:lnB w="6350">
-                      <a:solidFill>
-                        <a:srgbClr val="BFBFBF"/>
-                      </a:solidFill>
-                    </a:lnB>
-                  </a:tcPr>
-                </a:tc>
-                <a:tc>
-                  <a:txBody>
-                    <a:bodyPr/>
-                    <a:lstStyle/>
-                    <a:p>
-                      <a:pPr algn="ctr"/>
-                      <a:r>
-                        <a:rPr lang="en-US" altLang="ko-KR" dirty="0" sz="700" b="1">
-                          <a:solidFill>
-                            <a:srgbClr val="262626"/>
-                          </a:solidFill>
-                          <a:latin typeface="Arial"/>
-                          <a:cs typeface="Arial"/>
-                        </a:rPr>
-                        <a:t>20,127</a:t>
-                      </a:r>
-                    </a:p>
-                  </a:txBody>
-                  <a:tcPr marL="27432" marR="27432" marT="18288" marB="18288" anchor="ctr">
-                    <a:lnL w="6350">
-                      <a:solidFill>
-                        <a:srgbClr val="BFBFBF"/>
-                      </a:solidFill>
-                    </a:lnL>
-                    <a:lnR w="6350">
-                      <a:solidFill>
-                        <a:srgbClr val="BFBFBF"/>
-                      </a:solidFill>
-                    </a:lnR>
-                    <a:lnT w="6350">
-                      <a:solidFill>
-                        <a:srgbClr val="BFBFBF"/>
-                      </a:solidFill>
-                    </a:lnT>
-                    <a:lnB w="6350">
-                      <a:solidFill>
-                        <a:srgbClr val="BFBFBF"/>
-                      </a:solidFill>
-                    </a:lnB>
-                    <a:solidFill>
-                      <a:srgbClr val="EAF3EC"/>
-                    </a:solidFill>
-                  </a:tcPr>
-                </a:tc>
-                <a:tc>
-                  <a:txBody>
-                    <a:bodyPr/>
-                    <a:lstStyle/>
-                    <a:p>
-                      <a:pPr algn="ctr"/>
-                      <a:r>
-                        <a:rPr lang="en-US" altLang="ko-KR" dirty="0" sz="700" b="1">
-                          <a:solidFill>
-                            <a:srgbClr val="00703C"/>
-                          </a:solidFill>
-                          <a:latin typeface="Arial"/>
-                          <a:cs typeface="Arial"/>
-                        </a:rPr>
-                        <a:t>+20.7%</a:t>
-                      </a:r>
-                    </a:p>
-                  </a:txBody>
-                  <a:tcPr marL="27432" marR="27432" marT="18288" marB="18288" anchor="ctr">
-                    <a:lnL w="6350">
-                      <a:solidFill>
-                        <a:srgbClr val="BFBFBF"/>
-                      </a:solidFill>
-                    </a:lnL>
-                    <a:lnR w="6350">
-                      <a:solidFill>
-                        <a:srgbClr val="BFBFBF"/>
-                      </a:solidFill>
-                    </a:lnR>
-                    <a:lnT w="6350">
-                      <a:solidFill>
-                        <a:srgbClr val="BFBFBF"/>
-                      </a:solidFill>
-                    </a:lnT>
-                    <a:lnB w="6350">
-                      <a:solidFill>
-                        <a:srgbClr val="BFBFBF"/>
-                      </a:solidFill>
-                    </a:lnB>
-                  </a:tcPr>
-                </a:tc>
-              </a:tr>
-              <a:tr h="173736">
-                <a:tc>
-                  <a:txBody>
-                    <a:bodyPr/>
-                    <a:lstStyle/>
-                    <a:p>
-                      <a:pPr algn="l"/>
-                      <a:r>
-                        <a:rPr lang="en-US" altLang="ko-KR" dirty="0" sz="700">
-                          <a:solidFill>
-                            <a:srgbClr val="262626"/>
-                          </a:solidFill>
-                          <a:latin typeface="Arial"/>
-                          <a:cs typeface="Arial"/>
-                        </a:rPr>
-                        <a:t>Run rate/h*</a:t>
-                      </a:r>
-                    </a:p>
-                  </a:txBody>
-                  <a:tcPr marL="27432" marR="27432" marT="18288" marB="18288" anchor="ctr">
-                    <a:lnL w="6350">
-                      <a:solidFill>
-                        <a:srgbClr val="BFBFBF"/>
-                      </a:solidFill>
-                    </a:lnL>
-                    <a:lnR w="6350">
-                      <a:solidFill>
-                        <a:srgbClr val="BFBFBF"/>
-                      </a:solidFill>
-                    </a:lnR>
-                    <a:lnT w="6350">
-                      <a:solidFill>
-                        <a:srgbClr val="BFBFBF"/>
-                      </a:solidFill>
-                    </a:lnT>
-                    <a:lnB w="6350">
-                      <a:solidFill>
-                        <a:srgbClr val="BFBFBF"/>
-                      </a:solidFill>
-                    </a:lnB>
-                    <a:solidFill>
-                      <a:srgbClr val="F2F2F2"/>
-                    </a:solidFill>
-                  </a:tcPr>
-                </a:tc>
-                <a:tc>
-                  <a:txBody>
-                    <a:bodyPr/>
-                    <a:lstStyle/>
-                    <a:p>
-                      <a:pPr algn="ctr"/>
-                      <a:r>
-                        <a:rPr lang="en-US" altLang="ko-KR" dirty="0" sz="700">
-                          <a:solidFill>
-                            <a:srgbClr val="262626"/>
-                          </a:solidFill>
-                          <a:latin typeface="Arial"/>
-                          <a:cs typeface="Arial"/>
-                        </a:rPr>
-                        <a:t>738.5</a:t>
-                      </a:r>
-                    </a:p>
-                  </a:txBody>
-                  <a:tcPr marL="27432" marR="27432" marT="18288" marB="18288" anchor="ctr">
-                    <a:lnL w="6350">
-                      <a:solidFill>
-                        <a:srgbClr val="BFBFBF"/>
-                      </a:solidFill>
-                    </a:lnL>
-                    <a:lnR w="6350">
-                      <a:solidFill>
-                        <a:srgbClr val="BFBFBF"/>
-                      </a:solidFill>
-                    </a:lnR>
-                    <a:lnT w="6350">
-                      <a:solidFill>
-                        <a:srgbClr val="BFBFBF"/>
-                      </a:solidFill>
-                    </a:lnT>
-                    <a:lnB w="6350">
-                      <a:solidFill>
-                        <a:srgbClr val="BFBFBF"/>
-                      </a:solidFill>
-                    </a:lnB>
-                  </a:tcPr>
-                </a:tc>
-                <a:tc>
-                  <a:txBody>
-                    <a:bodyPr/>
-                    <a:lstStyle/>
-                    <a:p>
-                      <a:pPr algn="ctr"/>
-                      <a:r>
-                        <a:rPr lang="en-US" altLang="ko-KR" dirty="0" sz="700">
-                          <a:solidFill>
-                            <a:srgbClr val="262626"/>
-                          </a:solidFill>
-                          <a:latin typeface="Arial"/>
-                          <a:cs typeface="Arial"/>
-                        </a:rPr>
-                        <a:t>785.5</a:t>
-                      </a:r>
-                    </a:p>
-                  </a:txBody>
-                  <a:tcPr marL="27432" marR="27432" marT="18288" marB="18288" anchor="ctr">
-                    <a:lnL w="6350">
-                      <a:solidFill>
-                        <a:srgbClr val="BFBFBF"/>
-                      </a:solidFill>
-                    </a:lnL>
-                    <a:lnR w="6350">
-                      <a:solidFill>
-                        <a:srgbClr val="BFBFBF"/>
-                      </a:solidFill>
-                    </a:lnR>
-                    <a:lnT w="6350">
-                      <a:solidFill>
-                        <a:srgbClr val="BFBFBF"/>
-                      </a:solidFill>
-                    </a:lnT>
-                    <a:lnB w="6350">
-                      <a:solidFill>
-                        <a:srgbClr val="BFBFBF"/>
-                      </a:solidFill>
-                    </a:lnB>
-                  </a:tcPr>
-                </a:tc>
-                <a:tc>
-                  <a:txBody>
-                    <a:bodyPr/>
-                    <a:lstStyle/>
-                    <a:p>
-                      <a:pPr algn="ctr"/>
-                      <a:r>
-                        <a:rPr lang="en-US" altLang="ko-KR" dirty="0" sz="700" b="1">
-                          <a:solidFill>
-                            <a:srgbClr val="262626"/>
-                          </a:solidFill>
-                          <a:latin typeface="Arial"/>
-                          <a:cs typeface="Arial"/>
-                        </a:rPr>
-                        <a:t>838.6</a:t>
-                      </a:r>
-                    </a:p>
-                  </a:txBody>
-                  <a:tcPr marL="27432" marR="27432" marT="18288" marB="18288" anchor="ctr">
-                    <a:lnL w="6350">
-                      <a:solidFill>
-                        <a:srgbClr val="BFBFBF"/>
-                      </a:solidFill>
-                    </a:lnL>
-                    <a:lnR w="6350">
-                      <a:solidFill>
-                        <a:srgbClr val="BFBFBF"/>
-                      </a:solidFill>
-                    </a:lnR>
-                    <a:lnT w="6350">
-                      <a:solidFill>
-                        <a:srgbClr val="BFBFBF"/>
-                      </a:solidFill>
-                    </a:lnT>
-                    <a:lnB w="6350">
-                      <a:solidFill>
-                        <a:srgbClr val="BFBFBF"/>
-                      </a:solidFill>
-                    </a:lnB>
-                    <a:solidFill>
-                      <a:srgbClr val="EAF3EC"/>
-                    </a:solidFill>
-                  </a:tcPr>
-                </a:tc>
-                <a:tc>
-                  <a:txBody>
-                    <a:bodyPr/>
-                    <a:lstStyle/>
-                    <a:p>
-                      <a:pPr algn="ctr"/>
-                      <a:r>
-                        <a:rPr lang="en-US" altLang="ko-KR" dirty="0" sz="700" b="1">
-                          <a:solidFill>
-                            <a:srgbClr val="00703C"/>
-                          </a:solidFill>
-                          <a:latin typeface="Arial"/>
-                          <a:cs typeface="Arial"/>
-                        </a:rPr>
-                        <a:t>+13.6%</a:t>
-                      </a:r>
-                    </a:p>
-                  </a:txBody>
-                  <a:tcPr marL="27432" marR="27432" marT="18288" marB="18288" anchor="ctr">
-                    <a:lnL w="6350">
-                      <a:solidFill>
-                        <a:srgbClr val="BFBFBF"/>
-                      </a:solidFill>
-                    </a:lnL>
-                    <a:lnR w="6350">
-                      <a:solidFill>
-                        <a:srgbClr val="BFBFBF"/>
-                      </a:solidFill>
-                    </a:lnR>
-                    <a:lnT w="6350">
-                      <a:solidFill>
-                        <a:srgbClr val="BFBFBF"/>
-                      </a:solidFill>
-                    </a:lnT>
-                    <a:lnB w="6350">
-                      <a:solidFill>
-                        <a:srgbClr val="BFBFBF"/>
-                      </a:solidFill>
-                    </a:lnB>
-                  </a:tcPr>
-                </a:tc>
-              </a:tr>
-              <a:tr h="173736">
-                <a:tc>
-                  <a:txBody>
-                    <a:bodyPr/>
-                    <a:lstStyle/>
-                    <a:p>
-                      <a:pPr algn="l"/>
-                      <a:r>
-                        <a:rPr lang="en-US" altLang="ko-KR" dirty="0" sz="700">
-                          <a:solidFill>
-                            <a:srgbClr val="262626"/>
-                          </a:solidFill>
-                          <a:latin typeface="Arial"/>
-                          <a:cs typeface="Arial"/>
-                        </a:rPr>
-                        <a:t>Best hour</a:t>
-                      </a:r>
-                    </a:p>
-                  </a:txBody>
-                  <a:tcPr marL="27432" marR="27432" marT="18288" marB="18288" anchor="ctr">
-                    <a:lnL w="6350">
-                      <a:solidFill>
-                        <a:srgbClr val="BFBFBF"/>
-                      </a:solidFill>
-                    </a:lnL>
-                    <a:lnR w="6350">
-                      <a:solidFill>
-                        <a:srgbClr val="BFBFBF"/>
-                      </a:solidFill>
-                    </a:lnR>
-                    <a:lnT w="6350">
-                      <a:solidFill>
-                        <a:srgbClr val="BFBFBF"/>
-                      </a:solidFill>
-                    </a:lnT>
-                    <a:lnB w="6350">
-                      <a:solidFill>
-                        <a:srgbClr val="BFBFBF"/>
-                      </a:solidFill>
-                    </a:lnB>
-                    <a:solidFill>
-                      <a:srgbClr val="F2F2F2"/>
-                    </a:solidFill>
-                  </a:tcPr>
-                </a:tc>
-                <a:tc>
-                  <a:txBody>
-                    <a:bodyPr/>
-                    <a:lstStyle/>
-                    <a:p>
-                      <a:pPr algn="ctr"/>
-                      <a:r>
-                        <a:rPr lang="en-US" altLang="ko-KR" dirty="0" sz="700">
-                          <a:solidFill>
-                            <a:srgbClr val="262626"/>
-                          </a:solidFill>
-                          <a:latin typeface="Arial"/>
-                          <a:cs typeface="Arial"/>
-                        </a:rPr>
-                        <a:t>869</a:t>
-                      </a:r>
-                    </a:p>
-                  </a:txBody>
-                  <a:tcPr marL="27432" marR="27432" marT="18288" marB="18288" anchor="ctr">
-                    <a:lnL w="6350">
-                      <a:solidFill>
-                        <a:srgbClr val="BFBFBF"/>
-                      </a:solidFill>
-                    </a:lnL>
-                    <a:lnR w="6350">
-                      <a:solidFill>
-                        <a:srgbClr val="BFBFBF"/>
-                      </a:solidFill>
-                    </a:lnR>
-                    <a:lnT w="6350">
-                      <a:solidFill>
-                        <a:srgbClr val="BFBFBF"/>
-                      </a:solidFill>
-                    </a:lnT>
-                    <a:lnB w="6350">
-                      <a:solidFill>
-                        <a:srgbClr val="BFBFBF"/>
-                      </a:solidFill>
-                    </a:lnB>
-                  </a:tcPr>
-                </a:tc>
-                <a:tc>
-                  <a:txBody>
-                    <a:bodyPr/>
-                    <a:lstStyle/>
-                    <a:p>
-                      <a:pPr algn="ctr"/>
-                      <a:r>
-                        <a:rPr lang="en-US" altLang="ko-KR" dirty="0" sz="700">
-                          <a:solidFill>
-                            <a:srgbClr val="262626"/>
-                          </a:solidFill>
-                          <a:latin typeface="Arial"/>
-                          <a:cs typeface="Arial"/>
-                        </a:rPr>
-                        <a:t>1,003</a:t>
-                      </a:r>
-                    </a:p>
-                  </a:txBody>
-                  <a:tcPr marL="27432" marR="27432" marT="18288" marB="18288" anchor="ctr">
-                    <a:lnL w="6350">
-                      <a:solidFill>
-                        <a:srgbClr val="BFBFBF"/>
-                      </a:solidFill>
-                    </a:lnL>
-                    <a:lnR w="6350">
-                      <a:solidFill>
-                        <a:srgbClr val="BFBFBF"/>
-                      </a:solidFill>
-                    </a:lnR>
-                    <a:lnT w="6350">
-                      <a:solidFill>
-                        <a:srgbClr val="BFBFBF"/>
-                      </a:solidFill>
-                    </a:lnT>
-                    <a:lnB w="6350">
-                      <a:solidFill>
-                        <a:srgbClr val="BFBFBF"/>
-                      </a:solidFill>
-                    </a:lnB>
-                  </a:tcPr>
-                </a:tc>
-                <a:tc>
-                  <a:txBody>
-                    <a:bodyPr/>
-                    <a:lstStyle/>
-                    <a:p>
-                      <a:pPr algn="ctr"/>
-                      <a:r>
-                        <a:rPr lang="en-US" altLang="ko-KR" dirty="0" sz="700" b="1">
-                          <a:solidFill>
-                            <a:srgbClr val="262626"/>
-                          </a:solidFill>
-                          <a:latin typeface="Arial"/>
-                          <a:cs typeface="Arial"/>
-                        </a:rPr>
-                        <a:t>977</a:t>
-                      </a:r>
-                    </a:p>
-                  </a:txBody>
-                  <a:tcPr marL="27432" marR="27432" marT="18288" marB="18288" anchor="ctr">
-                    <a:lnL w="6350">
-                      <a:solidFill>
-                        <a:srgbClr val="BFBFBF"/>
-                      </a:solidFill>
-                    </a:lnL>
-                    <a:lnR w="6350">
-                      <a:solidFill>
-                        <a:srgbClr val="BFBFBF"/>
-                      </a:solidFill>
-                    </a:lnR>
-                    <a:lnT w="6350">
-                      <a:solidFill>
-                        <a:srgbClr val="BFBFBF"/>
-                      </a:solidFill>
-                    </a:lnT>
-                    <a:lnB w="6350">
-                      <a:solidFill>
-                        <a:srgbClr val="BFBFBF"/>
-                      </a:solidFill>
-                    </a:lnB>
-                    <a:solidFill>
-                      <a:srgbClr val="EAF3EC"/>
-                    </a:solidFill>
-                  </a:tcPr>
-                </a:tc>
-                <a:tc>
-                  <a:txBody>
-                    <a:bodyPr/>
-                    <a:lstStyle/>
-                    <a:p>
-                      <a:pPr algn="ctr"/>
-                      <a:r>
-                        <a:rPr lang="en-US" altLang="ko-KR" dirty="0" sz="700" b="1">
-                          <a:solidFill>
-                            <a:srgbClr val="00703C"/>
-                          </a:solidFill>
-                          <a:latin typeface="Arial"/>
-                          <a:cs typeface="Arial"/>
-                        </a:rPr>
-                        <a:t>+12.4%</a:t>
-                      </a:r>
-                    </a:p>
-                  </a:txBody>
-                  <a:tcPr marL="27432" marR="27432" marT="18288" marB="18288" anchor="ctr">
-                    <a:lnL w="6350">
-                      <a:solidFill>
-                        <a:srgbClr val="BFBFBF"/>
-                      </a:solidFill>
-                    </a:lnL>
-                    <a:lnR w="6350">
-                      <a:solidFill>
-                        <a:srgbClr val="BFBFBF"/>
-                      </a:solidFill>
-                    </a:lnR>
-                    <a:lnT w="6350">
-                      <a:solidFill>
-                        <a:srgbClr val="BFBFBF"/>
-                      </a:solidFill>
-                    </a:lnT>
-                    <a:lnB w="6350">
-                      <a:solidFill>
-                        <a:srgbClr val="BFBFBF"/>
-                      </a:solidFill>
-                    </a:lnB>
-                  </a:tcPr>
-                </a:tc>
-              </a:tr>
-              <a:tr h="173736">
-                <a:tc>
-                  <a:txBody>
-                    <a:bodyPr/>
-                    <a:lstStyle/>
-                    <a:p>
-                      <a:pPr algn="l"/>
-                      <a:r>
-                        <a:rPr lang="en-US" altLang="ko-KR" dirty="0" sz="700">
-                          <a:solidFill>
-                            <a:srgbClr val="262626"/>
-                          </a:solidFill>
-                          <a:latin typeface="Arial"/>
-                          <a:cs typeface="Arial"/>
-                        </a:rPr>
-                        <a:t>Hours ≥ 900</a:t>
-                      </a:r>
-                    </a:p>
-                  </a:txBody>
-                  <a:tcPr marL="27432" marR="27432" marT="18288" marB="18288" anchor="ctr">
-                    <a:lnL w="6350">
-                      <a:solidFill>
-                        <a:srgbClr val="BFBFBF"/>
-                      </a:solidFill>
-                    </a:lnL>
-                    <a:lnR w="6350">
-                      <a:solidFill>
-                        <a:srgbClr val="BFBFBF"/>
-                      </a:solidFill>
-                    </a:lnR>
-                    <a:lnT w="6350">
-                      <a:solidFill>
-                        <a:srgbClr val="BFBFBF"/>
-                      </a:solidFill>
-                    </a:lnT>
-                    <a:lnB w="6350">
-                      <a:solidFill>
-                        <a:srgbClr val="BFBFBF"/>
-                      </a:solidFill>
-                    </a:lnB>
-                    <a:solidFill>
-                      <a:srgbClr val="F2F2F2"/>
-                    </a:solidFill>
-                  </a:tcPr>
-                </a:tc>
-                <a:tc>
-                  <a:txBody>
-                    <a:bodyPr/>
-                    <a:lstStyle/>
-                    <a:p>
-                      <a:pPr algn="ctr"/>
-                      <a:r>
-                        <a:rPr lang="en-US" altLang="ko-KR" dirty="0" sz="700">
-                          <a:solidFill>
-                            <a:srgbClr val="262626"/>
-                          </a:solidFill>
-                          <a:latin typeface="Arial"/>
-                          <a:cs typeface="Arial"/>
-                        </a:rPr>
-                        <a:t>0</a:t>
-                      </a:r>
-                    </a:p>
-                  </a:txBody>
-                  <a:tcPr marL="27432" marR="27432" marT="18288" marB="18288" anchor="ctr">
-                    <a:lnL w="6350">
-                      <a:solidFill>
-                        <a:srgbClr val="BFBFBF"/>
-                      </a:solidFill>
-                    </a:lnL>
-                    <a:lnR w="6350">
-                      <a:solidFill>
-                        <a:srgbClr val="BFBFBF"/>
-                      </a:solidFill>
-                    </a:lnR>
-                    <a:lnT w="6350">
-                      <a:solidFill>
-                        <a:srgbClr val="BFBFBF"/>
-                      </a:solidFill>
-                    </a:lnT>
-                    <a:lnB w="6350">
-                      <a:solidFill>
-                        <a:srgbClr val="BFBFBF"/>
-                      </a:solidFill>
-                    </a:lnB>
-                  </a:tcPr>
-                </a:tc>
-                <a:tc>
-                  <a:txBody>
-                    <a:bodyPr/>
-                    <a:lstStyle/>
-                    <a:p>
-                      <a:pPr algn="ctr"/>
-                      <a:r>
-                        <a:rPr lang="en-US" altLang="ko-KR" dirty="0" sz="700">
-                          <a:solidFill>
-                            <a:srgbClr val="262626"/>
-                          </a:solidFill>
-                          <a:latin typeface="Arial"/>
-                          <a:cs typeface="Arial"/>
-                        </a:rPr>
-                        <a:t>5</a:t>
-                      </a:r>
-                    </a:p>
-                  </a:txBody>
-                  <a:tcPr marL="27432" marR="27432" marT="18288" marB="18288" anchor="ctr">
-                    <a:lnL w="6350">
-                      <a:solidFill>
-                        <a:srgbClr val="BFBFBF"/>
-                      </a:solidFill>
-                    </a:lnL>
-                    <a:lnR w="6350">
-                      <a:solidFill>
-                        <a:srgbClr val="BFBFBF"/>
-                      </a:solidFill>
-                    </a:lnR>
-                    <a:lnT w="6350">
-                      <a:solidFill>
-                        <a:srgbClr val="BFBFBF"/>
-                      </a:solidFill>
-                    </a:lnT>
-                    <a:lnB w="6350">
-                      <a:solidFill>
-                        <a:srgbClr val="BFBFBF"/>
-                      </a:solidFill>
-                    </a:lnB>
-                  </a:tcPr>
-                </a:tc>
-                <a:tc>
-                  <a:txBody>
-                    <a:bodyPr/>
-                    <a:lstStyle/>
-                    <a:p>
-                      <a:pPr algn="ctr"/>
-                      <a:r>
-                        <a:rPr lang="en-US" altLang="ko-KR" dirty="0" sz="700" b="1">
-                          <a:solidFill>
-                            <a:srgbClr val="262626"/>
-                          </a:solidFill>
-                          <a:latin typeface="Arial"/>
-                          <a:cs typeface="Arial"/>
-                        </a:rPr>
-                        <a:t>8</a:t>
-                      </a:r>
-                    </a:p>
-                  </a:txBody>
-                  <a:tcPr marL="27432" marR="27432" marT="18288" marB="18288" anchor="ctr">
-                    <a:lnL w="6350">
-                      <a:solidFill>
-                        <a:srgbClr val="BFBFBF"/>
-                      </a:solidFill>
-                    </a:lnL>
-                    <a:lnR w="6350">
-                      <a:solidFill>
-                        <a:srgbClr val="BFBFBF"/>
-                      </a:solidFill>
-                    </a:lnR>
-                    <a:lnT w="6350">
-                      <a:solidFill>
-                        <a:srgbClr val="BFBFBF"/>
-                      </a:solidFill>
-                    </a:lnT>
-                    <a:lnB w="6350">
-                      <a:solidFill>
-                        <a:srgbClr val="BFBFBF"/>
-                      </a:solidFill>
-                    </a:lnB>
-                    <a:solidFill>
-                      <a:srgbClr val="EAF3EC"/>
-                    </a:solidFill>
-                  </a:tcPr>
-                </a:tc>
-                <a:tc>
-                  <a:txBody>
-                    <a:bodyPr/>
-                    <a:lstStyle/>
-                    <a:p>
-                      <a:pPr algn="ctr"/>
-                      <a:r>
-                        <a:rPr lang="en-US" altLang="ko-KR" dirty="0" sz="700" b="1">
-                          <a:solidFill>
-                            <a:srgbClr val="00703C"/>
-                          </a:solidFill>
-                          <a:latin typeface="Arial"/>
-                          <a:cs typeface="Arial"/>
-                        </a:rPr>
-                        <a:t>+8</a:t>
-                      </a:r>
-                    </a:p>
-                  </a:txBody>
-                  <a:tcPr marL="27432" marR="27432" marT="18288" marB="18288" anchor="ctr">
-                    <a:lnL w="6350">
-                      <a:solidFill>
-                        <a:srgbClr val="BFBFBF"/>
-                      </a:solidFill>
-                    </a:lnL>
-                    <a:lnR w="6350">
-                      <a:solidFill>
-                        <a:srgbClr val="BFBFBF"/>
-                      </a:solidFill>
-                    </a:lnR>
-                    <a:lnT w="6350">
-                      <a:solidFill>
-                        <a:srgbClr val="BFBFBF"/>
-                      </a:solidFill>
-                    </a:lnT>
-                    <a:lnB w="6350">
-                      <a:solidFill>
-                        <a:srgbClr val="BFBFBF"/>
-                      </a:solidFill>
-                    </a:lnB>
-                  </a:tcPr>
-                </a:tc>
-              </a:tr>
-              <a:tr h="173736">
-                <a:tc>
-                  <a:txBody>
-                    <a:bodyPr/>
-                    <a:lstStyle/>
-                    <a:p>
-                      <a:pPr algn="l"/>
-                      <a:r>
-                        <a:rPr lang="en-US" altLang="ko-KR" dirty="0" sz="700">
-                          <a:solidFill>
-                            <a:srgbClr val="262626"/>
-                          </a:solidFill>
-                          <a:latin typeface="Arial"/>
-                          <a:cs typeface="Arial"/>
-                        </a:rPr>
-                        <a:t>Stop hours</a:t>
-                      </a:r>
-                    </a:p>
-                  </a:txBody>
-                  <a:tcPr marL="27432" marR="27432" marT="18288" marB="18288" anchor="ctr">
-                    <a:lnL w="6350">
-                      <a:solidFill>
-                        <a:srgbClr val="BFBFBF"/>
-                      </a:solidFill>
-                    </a:lnL>
-                    <a:lnR w="6350">
-                      <a:solidFill>
-                        <a:srgbClr val="BFBFBF"/>
-                      </a:solidFill>
-                    </a:lnR>
-                    <a:lnT w="6350">
-                      <a:solidFill>
-                        <a:srgbClr val="BFBFBF"/>
-                      </a:solidFill>
-                    </a:lnT>
-                    <a:lnB w="6350">
-                      <a:solidFill>
-                        <a:srgbClr val="BFBFBF"/>
-                      </a:solidFill>
-                    </a:lnB>
-                    <a:solidFill>
-                      <a:srgbClr val="F2F2F2"/>
-                    </a:solidFill>
-                  </a:tcPr>
-                </a:tc>
-                <a:tc>
-                  <a:txBody>
-                    <a:bodyPr/>
-                    <a:lstStyle/>
-                    <a:p>
-                      <a:pPr algn="ctr"/>
-                      <a:r>
-                        <a:rPr lang="en-US" altLang="ko-KR" dirty="0" sz="700">
-                          <a:solidFill>
-                            <a:srgbClr val="262626"/>
-                          </a:solidFill>
-                          <a:latin typeface="Arial"/>
-                          <a:cs typeface="Arial"/>
-                        </a:rPr>
-                        <a:t>3</a:t>
-                      </a:r>
-                    </a:p>
-                  </a:txBody>
-                  <a:tcPr marL="27432" marR="27432" marT="18288" marB="18288" anchor="ctr">
-                    <a:lnL w="6350">
-                      <a:solidFill>
-                        <a:srgbClr val="BFBFBF"/>
-                      </a:solidFill>
-                    </a:lnL>
-                    <a:lnR w="6350">
-                      <a:solidFill>
-                        <a:srgbClr val="BFBFBF"/>
-                      </a:solidFill>
-                    </a:lnR>
-                    <a:lnT w="6350">
-                      <a:solidFill>
-                        <a:srgbClr val="BFBFBF"/>
-                      </a:solidFill>
-                    </a:lnT>
-                    <a:lnB w="6350">
-                      <a:solidFill>
-                        <a:srgbClr val="BFBFBF"/>
-                      </a:solidFill>
-                    </a:lnB>
-                  </a:tcPr>
-                </a:tc>
-                <a:tc>
-                  <a:txBody>
-                    <a:bodyPr/>
-                    <a:lstStyle/>
-                    <a:p>
-                      <a:pPr algn="ctr"/>
-                      <a:r>
-                        <a:rPr lang="en-US" altLang="ko-KR" dirty="0" sz="700">
-                          <a:solidFill>
-                            <a:srgbClr val="262626"/>
-                          </a:solidFill>
-                          <a:latin typeface="Arial"/>
-                          <a:cs typeface="Arial"/>
-                        </a:rPr>
-                        <a:t>3</a:t>
-                      </a:r>
-                    </a:p>
-                  </a:txBody>
-                  <a:tcPr marL="27432" marR="27432" marT="18288" marB="18288" anchor="ctr">
-                    <a:lnL w="6350">
-                      <a:solidFill>
-                        <a:srgbClr val="BFBFBF"/>
-                      </a:solidFill>
-                    </a:lnL>
-                    <a:lnR w="6350">
-                      <a:solidFill>
-                        <a:srgbClr val="BFBFBF"/>
-                      </a:solidFill>
-                    </a:lnR>
-                    <a:lnT w="6350">
-                      <a:solidFill>
-                        <a:srgbClr val="BFBFBF"/>
-                      </a:solidFill>
-                    </a:lnT>
-                    <a:lnB w="6350">
-                      <a:solidFill>
-                        <a:srgbClr val="BFBFBF"/>
-                      </a:solidFill>
-                    </a:lnB>
-                  </a:tcPr>
-                </a:tc>
-                <a:tc>
-                  <a:txBody>
-                    <a:bodyPr/>
-                    <a:lstStyle/>
-                    <a:p>
-                      <a:pPr algn="ctr"/>
-                      <a:r>
-                        <a:rPr lang="en-US" altLang="ko-KR" dirty="0" sz="700" b="1">
-                          <a:solidFill>
-                            <a:srgbClr val="262626"/>
-                          </a:solidFill>
-                          <a:latin typeface="Arial"/>
-                          <a:cs typeface="Arial"/>
-                        </a:rPr>
-                        <a:t>0</a:t>
-                      </a:r>
-                    </a:p>
-                  </a:txBody>
-                  <a:tcPr marL="27432" marR="27432" marT="18288" marB="18288" anchor="ctr">
-                    <a:lnL w="6350">
-                      <a:solidFill>
-                        <a:srgbClr val="BFBFBF"/>
-                      </a:solidFill>
-                    </a:lnL>
-                    <a:lnR w="6350">
-                      <a:solidFill>
-                        <a:srgbClr val="BFBFBF"/>
-                      </a:solidFill>
-                    </a:lnR>
-                    <a:lnT w="6350">
-                      <a:solidFill>
-                        <a:srgbClr val="BFBFBF"/>
-                      </a:solidFill>
-                    </a:lnT>
-                    <a:lnB w="6350">
-                      <a:solidFill>
-                        <a:srgbClr val="BFBFBF"/>
-                      </a:solidFill>
-                    </a:lnB>
-                    <a:solidFill>
-                      <a:srgbClr val="EAF3EC"/>
-                    </a:solidFill>
-                  </a:tcPr>
-                </a:tc>
-                <a:tc>
-                  <a:txBody>
-                    <a:bodyPr/>
-                    <a:lstStyle/>
-                    <a:p>
-                      <a:pPr algn="ctr"/>
-                      <a:r>
-                        <a:rPr lang="en-US" altLang="ko-KR" dirty="0" sz="700" b="1">
-                          <a:solidFill>
-                            <a:srgbClr val="00703C"/>
-                          </a:solidFill>
-                          <a:latin typeface="Arial"/>
-                          <a:cs typeface="Arial"/>
-                        </a:rPr>
-                        <a:t>-3</a:t>
-                      </a:r>
-                    </a:p>
-                  </a:txBody>
-                  <a:tcPr marL="27432" marR="27432" marT="18288" marB="18288" anchor="ctr">
-                    <a:lnL w="6350">
-                      <a:solidFill>
-                        <a:srgbClr val="BFBFBF"/>
-                      </a:solidFill>
-                    </a:lnL>
-                    <a:lnR w="6350">
-                      <a:solidFill>
-                        <a:srgbClr val="BFBFBF"/>
-                      </a:solidFill>
-                    </a:lnR>
-                    <a:lnT w="6350">
-                      <a:solidFill>
-                        <a:srgbClr val="BFBFBF"/>
-                      </a:solidFill>
-                    </a:lnT>
-                    <a:lnB w="6350">
-                      <a:solidFill>
-                        <a:srgbClr val="BFBFBF"/>
-                      </a:solidFill>
-                    </a:lnB>
-                  </a:tcPr>
-                </a:tc>
-              </a:tr>
-              <a:tr h="173736">
-                <a:tc>
-                  <a:txBody>
-                    <a:bodyPr/>
-                    <a:lstStyle/>
-                    <a:p>
-                      <a:pPr algn="l"/>
-                      <a:r>
-                        <a:rPr lang="en-US" altLang="ko-KR" dirty="0" sz="700">
-                          <a:solidFill>
-                            <a:srgbClr val="262626"/>
-                          </a:solidFill>
-                          <a:latin typeface="Arial"/>
-                          <a:cs typeface="Arial"/>
-                        </a:rPr>
-                        <a:t>Lost to stops</a:t>
-                      </a:r>
-                    </a:p>
-                  </a:txBody>
-                  <a:tcPr marL="27432" marR="27432" marT="18288" marB="18288" anchor="ctr">
-                    <a:lnL w="6350">
-                      <a:solidFill>
-                        <a:srgbClr val="BFBFBF"/>
-                      </a:solidFill>
-                    </a:lnL>
-                    <a:lnR w="6350">
-                      <a:solidFill>
-                        <a:srgbClr val="BFBFBF"/>
-                      </a:solidFill>
-                    </a:lnR>
-                    <a:lnT w="6350">
-                      <a:solidFill>
-                        <a:srgbClr val="BFBFBF"/>
-                      </a:solidFill>
-                    </a:lnT>
-                    <a:lnB w="6350">
-                      <a:solidFill>
-                        <a:srgbClr val="BFBFBF"/>
-                      </a:solidFill>
-                    </a:lnB>
-                    <a:solidFill>
-                      <a:srgbClr val="F2F2F2"/>
-                    </a:solidFill>
-                  </a:tcPr>
-                </a:tc>
-                <a:tc>
-                  <a:txBody>
-                    <a:bodyPr/>
-                    <a:lstStyle/>
-                    <a:p>
-                      <a:pPr algn="ctr"/>
-                      <a:r>
-                        <a:rPr lang="en-US" altLang="ko-KR" dirty="0" sz="700">
-                          <a:solidFill>
-                            <a:srgbClr val="262626"/>
-                          </a:solidFill>
-                          <a:latin typeface="Arial"/>
-                          <a:cs typeface="Arial"/>
-                        </a:rPr>
-                        <a:t>~1,889</a:t>
-                      </a:r>
-                    </a:p>
-                  </a:txBody>
-                  <a:tcPr marL="27432" marR="27432" marT="18288" marB="18288" anchor="ctr">
-                    <a:lnL w="6350">
-                      <a:solidFill>
-                        <a:srgbClr val="BFBFBF"/>
-                      </a:solidFill>
-                    </a:lnL>
-                    <a:lnR w="6350">
-                      <a:solidFill>
-                        <a:srgbClr val="BFBFBF"/>
-                      </a:solidFill>
-                    </a:lnR>
-                    <a:lnT w="6350">
-                      <a:solidFill>
-                        <a:srgbClr val="BFBFBF"/>
-                      </a:solidFill>
-                    </a:lnT>
-                    <a:lnB w="6350">
-                      <a:solidFill>
-                        <a:srgbClr val="BFBFBF"/>
-                      </a:solidFill>
-                    </a:lnB>
-                  </a:tcPr>
-                </a:tc>
-                <a:tc>
-                  <a:txBody>
-                    <a:bodyPr/>
-                    <a:lstStyle/>
-                    <a:p>
-                      <a:pPr algn="ctr"/>
-                      <a:r>
-                        <a:rPr lang="en-US" altLang="ko-KR" dirty="0" sz="700">
-                          <a:solidFill>
-                            <a:srgbClr val="262626"/>
-                          </a:solidFill>
-                          <a:latin typeface="Arial"/>
-                          <a:cs typeface="Arial"/>
-                        </a:rPr>
-                        <a:t>~2,442</a:t>
-                      </a:r>
-                    </a:p>
-                  </a:txBody>
-                  <a:tcPr marL="27432" marR="27432" marT="18288" marB="18288" anchor="ctr">
-                    <a:lnL w="6350">
-                      <a:solidFill>
-                        <a:srgbClr val="BFBFBF"/>
-                      </a:solidFill>
-                    </a:lnL>
-                    <a:lnR w="6350">
-                      <a:solidFill>
-                        <a:srgbClr val="BFBFBF"/>
-                      </a:solidFill>
-                    </a:lnR>
-                    <a:lnT w="6350">
-                      <a:solidFill>
-                        <a:srgbClr val="BFBFBF"/>
-                      </a:solidFill>
-                    </a:lnT>
-                    <a:lnB w="6350">
-                      <a:solidFill>
-                        <a:srgbClr val="BFBFBF"/>
-                      </a:solidFill>
-                    </a:lnB>
-                  </a:tcPr>
-                </a:tc>
-                <a:tc>
-                  <a:txBody>
-                    <a:bodyPr/>
-                    <a:lstStyle/>
-                    <a:p>
-                      <a:pPr algn="ctr"/>
-                      <a:r>
-                        <a:rPr lang="en-US" altLang="ko-KR" dirty="0" sz="700" b="1">
-                          <a:solidFill>
-                            <a:srgbClr val="262626"/>
-                          </a:solidFill>
-                          <a:latin typeface="Arial"/>
-                          <a:cs typeface="Arial"/>
-                        </a:rPr>
-                        <a:t>~900</a:t>
-                      </a:r>
-                    </a:p>
-                  </a:txBody>
-                  <a:tcPr marL="27432" marR="27432" marT="18288" marB="18288" anchor="ctr">
-                    <a:lnL w="6350">
-                      <a:solidFill>
-                        <a:srgbClr val="BFBFBF"/>
-                      </a:solidFill>
-                    </a:lnL>
-                    <a:lnR w="6350">
-                      <a:solidFill>
-                        <a:srgbClr val="BFBFBF"/>
-                      </a:solidFill>
-                    </a:lnR>
-                    <a:lnT w="6350">
-                      <a:solidFill>
-                        <a:srgbClr val="BFBFBF"/>
-                      </a:solidFill>
-                    </a:lnT>
-                    <a:lnB w="6350">
-                      <a:solidFill>
-                        <a:srgbClr val="BFBFBF"/>
-                      </a:solidFill>
-                    </a:lnB>
-                    <a:solidFill>
-                      <a:srgbClr val="EAF3EC"/>
-                    </a:solidFill>
-                  </a:tcPr>
-                </a:tc>
-                <a:tc>
-                  <a:txBody>
-                    <a:bodyPr/>
-                    <a:lstStyle/>
-                    <a:p>
-                      <a:pPr algn="ctr"/>
-                      <a:r>
-                        <a:rPr lang="en-US" altLang="ko-KR" dirty="0" sz="700" b="1">
-                          <a:solidFill>
-                            <a:srgbClr val="00703C"/>
-                          </a:solidFill>
-                          <a:latin typeface="Arial"/>
-                          <a:cs typeface="Arial"/>
-                        </a:rPr>
-                        <a:t>-52%</a:t>
-                      </a:r>
-                    </a:p>
-                  </a:txBody>
-                  <a:tcPr marL="27432" marR="27432" marT="18288" marB="18288" anchor="ctr">
-                    <a:lnL w="6350">
-                      <a:solidFill>
-                        <a:srgbClr val="BFBFBF"/>
-                      </a:solidFill>
-                    </a:lnL>
-                    <a:lnR w="6350">
-                      <a:solidFill>
-                        <a:srgbClr val="BFBFBF"/>
-                      </a:solidFill>
-                    </a:lnR>
-                    <a:lnT w="6350">
-                      <a:solidFill>
-                        <a:srgbClr val="BFBFBF"/>
-                      </a:solidFill>
-                    </a:lnT>
-                    <a:lnB w="6350">
-                      <a:solidFill>
-                        <a:srgbClr val="BFBFBF"/>
-                      </a:solidFill>
-                    </a:lnB>
-                  </a:tcPr>
-                </a:tc>
-              </a:tr>
-            </a:tbl>
-          </a:graphicData>
-        </a:graphic>
-      </p:graphicFrame>
       <p:sp>
         <p:nvSpPr>
           <p:cNvPr id="302" name="Source note"/>
@@ -9952,7 +8425,7 @@
                   <a:srgbClr val="7F7F7F"/>
                 </a:solidFill>
               </a:rPr>
-              <a:t>* Run rate = average of hours without stops. Δ = 2 Oct vs 12 Aug. Source: hourly production report, TOP TLA Line 1. 1 Oct ran a tightly controlled material (05-07 h estimated). Results reflect all updates combined.</a:t>
+              <a:t>Effects measured directly on the stations during validation. Line output and alarm impact to be measured on Line 2 after formal release.</a:t>
             </a:r>
           </a:p>
         </p:txBody>
@@ -9991,7 +8464,7 @@
                 <a:latin typeface="Arial"/>
                 <a:cs typeface="Arial"/>
               </a:rPr>
-              <a:t>Baseline · Line 1, 12 Aug 2026</a:t>
+              <a:t>Baseline before the change</a:t>
             </a:r>
           </a:p>
         </p:txBody>
@@ -10090,7 +8563,7 @@
                 <a:latin typeface="Arial"/>
                 <a:cs typeface="Arial"/>
               </a:rPr>
-              <a:t>~1,889 pcs</a:t>
+              <a:t>24 / 24</a:t>
             </a:r>
           </a:p>
           <a:p>
@@ -10103,7 +8576,7 @@
                 <a:latin typeface="Arial"/>
                 <a:cs typeface="Arial"/>
               </a:rPr>
-              <a:t>lost to stops / day</a:t>
+              <a:t>nodes always re-run</a:t>
             </a:r>
           </a:p>
         </p:txBody>
@@ -10146,7 +8619,7 @@
                 <a:latin typeface="Arial"/>
                 <a:cs typeface="Arial"/>
               </a:rPr>
-              <a:t>869 pcs</a:t>
+              <a:t>7</a:t>
             </a:r>
           </a:p>
           <a:p>
@@ -10159,7 +8632,7 @@
                 <a:latin typeface="Arial"/>
                 <a:cs typeface="Arial"/>
               </a:rPr>
-              <a:t>best hour of the day</a:t>
+              <a:t>stations affected</a:t>
             </a:r>
           </a:p>
         </p:txBody>
@@ -10167,6 +8640,286 @@
       <p:sp>
         <p:nvSpPr>
           <p:cNvPr id="405" name="Added box 405"/>
+          <p:cNvSpPr/>
+          <p:nvPr/>
+        </p:nvSpPr>
+        <p:spPr>
+          <a:xfrm>
+            <a:off x="7223760" y="2944368"/>
+            <a:ext cx="804672" cy="548640"/>
+          </a:xfrm>
+          <a:prstGeom prst="roundRect">
+            <a:avLst>
+              <a:gd name="adj" fmla="val 12000"/>
+            </a:avLst>
+          </a:prstGeom>
+          <a:solidFill>
+            <a:srgbClr val="F2F2F2"/>
+          </a:solidFill>
+          <a:ln w="6350">
+            <a:solidFill>
+              <a:srgbClr val="BFBFBF"/>
+            </a:solidFill>
+          </a:ln>
+        </p:spPr>
+        <p:txBody>
+          <a:bodyPr wrap="square" lIns="36000" tIns="18000" rIns="36000" bIns="18000" anchor="ctr"/>
+          <a:lstStyle/>
+          <a:p>
+            <a:pPr algn="ctr"/>
+            <a:r>
+              <a:rPr lang="en-US" altLang="ko-KR" dirty="0" sz="1200" b="1">
+                <a:solidFill>
+                  <a:srgbClr val="A50034"/>
+                </a:solidFill>
+                <a:latin typeface="Arial"/>
+                <a:cs typeface="Arial"/>
+              </a:rPr>
+              <a:t>2.5-3 min</a:t>
+            </a:r>
+          </a:p>
+          <a:p>
+            <a:pPr algn="ctr"/>
+            <a:r>
+              <a:rPr lang="en-US" altLang="ko-KR" dirty="0" sz="650">
+                <a:solidFill>
+                  <a:srgbClr val="404040"/>
+                </a:solidFill>
+                <a:latin typeface="Arial"/>
+                <a:cs typeface="Arial"/>
+              </a:rPr>
+              <a:t>before</a:t>
+            </a:r>
+          </a:p>
+        </p:txBody>
+      </p:sp>
+      <p:sp>
+        <p:nvSpPr>
+          <p:cNvPr id="406" name="Added box 406"/>
+          <p:cNvSpPr/>
+          <p:nvPr/>
+        </p:nvSpPr>
+        <p:spPr>
+          <a:xfrm>
+            <a:off x="8101583" y="2944368"/>
+            <a:ext cx="804672" cy="548640"/>
+          </a:xfrm>
+          <a:prstGeom prst="roundRect">
+            <a:avLst>
+              <a:gd name="adj" fmla="val 12000"/>
+            </a:avLst>
+          </a:prstGeom>
+          <a:solidFill>
+            <a:srgbClr val="F2F2F2"/>
+          </a:solidFill>
+          <a:ln w="6350">
+            <a:solidFill>
+              <a:srgbClr val="BFBFBF"/>
+            </a:solidFill>
+          </a:ln>
+        </p:spPr>
+        <p:txBody>
+          <a:bodyPr wrap="square" lIns="36000" tIns="18000" rIns="36000" bIns="18000" anchor="ctr"/>
+          <a:lstStyle/>
+          <a:p>
+            <a:pPr algn="ctr"/>
+            <a:r>
+              <a:rPr lang="en-US" altLang="ko-KR" dirty="0" sz="1200" b="1">
+                <a:solidFill>
+                  <a:srgbClr val="00703C"/>
+                </a:solidFill>
+                <a:latin typeface="Arial"/>
+                <a:cs typeface="Arial"/>
+              </a:rPr>
+              <a:t>10-15 s</a:t>
+            </a:r>
+          </a:p>
+          <a:p>
+            <a:pPr algn="ctr"/>
+            <a:r>
+              <a:rPr lang="en-US" altLang="ko-KR" dirty="0" sz="650">
+                <a:solidFill>
+                  <a:srgbClr val="404040"/>
+                </a:solidFill>
+                <a:latin typeface="Arial"/>
+                <a:cs typeface="Arial"/>
+              </a:rPr>
+              <a:t>after</a:t>
+            </a:r>
+          </a:p>
+        </p:txBody>
+      </p:sp>
+      <p:sp>
+        <p:nvSpPr>
+          <p:cNvPr id="407" name="Added box 407"/>
+          <p:cNvSpPr/>
+          <p:nvPr/>
+        </p:nvSpPr>
+        <p:spPr>
+          <a:xfrm>
+            <a:off x="8979408" y="2944368"/>
+            <a:ext cx="804672" cy="548640"/>
+          </a:xfrm>
+          <a:prstGeom prst="roundRect">
+            <a:avLst>
+              <a:gd name="adj" fmla="val 12000"/>
+            </a:avLst>
+          </a:prstGeom>
+          <a:solidFill>
+            <a:srgbClr val="F2F2F2"/>
+          </a:solidFill>
+          <a:ln w="6350">
+            <a:solidFill>
+              <a:srgbClr val="BFBFBF"/>
+            </a:solidFill>
+          </a:ln>
+        </p:spPr>
+        <p:txBody>
+          <a:bodyPr wrap="square" lIns="36000" tIns="18000" rIns="36000" bIns="18000" anchor="ctr"/>
+          <a:lstStyle/>
+          <a:p>
+            <a:pPr algn="ctr"/>
+            <a:r>
+              <a:rPr lang="en-US" altLang="ko-KR" dirty="0" sz="1200" b="1">
+                <a:solidFill>
+                  <a:srgbClr val="00703C"/>
+                </a:solidFill>
+                <a:latin typeface="Arial"/>
+                <a:cs typeface="Arial"/>
+              </a:rPr>
+              <a:t>-90%+</a:t>
+            </a:r>
+          </a:p>
+          <a:p>
+            <a:pPr algn="ctr"/>
+            <a:r>
+              <a:rPr lang="en-US" altLang="ko-KR" dirty="0" sz="650">
+                <a:solidFill>
+                  <a:srgbClr val="404040"/>
+                </a:solidFill>
+                <a:latin typeface="Arial"/>
+                <a:cs typeface="Arial"/>
+              </a:rPr>
+              <a:t>restart time</a:t>
+            </a:r>
+          </a:p>
+        </p:txBody>
+      </p:sp>
+      <p:sp>
+        <p:nvSpPr>
+          <p:cNvPr id="408" name="Added box 408"/>
+          <p:cNvSpPr/>
+          <p:nvPr/>
+        </p:nvSpPr>
+        <p:spPr>
+          <a:xfrm>
+            <a:off x="7223760" y="3566160"/>
+            <a:ext cx="1207008" cy="502920"/>
+          </a:xfrm>
+          <a:prstGeom prst="roundRect">
+            <a:avLst>
+              <a:gd name="adj" fmla="val 12000"/>
+            </a:avLst>
+          </a:prstGeom>
+          <a:solidFill>
+            <a:srgbClr val="F2F2F2"/>
+          </a:solidFill>
+          <a:ln w="6350">
+            <a:solidFill>
+              <a:srgbClr val="BFBFBF"/>
+            </a:solidFill>
+          </a:ln>
+        </p:spPr>
+        <p:txBody>
+          <a:bodyPr wrap="square" lIns="36000" tIns="18000" rIns="36000" bIns="18000" anchor="ctr"/>
+          <a:lstStyle/>
+          <a:p>
+            <a:pPr algn="ctr"/>
+            <a:r>
+              <a:rPr lang="en-US" altLang="ko-KR" dirty="0" sz="1100" b="1">
+                <a:solidFill>
+                  <a:srgbClr val="404040"/>
+                </a:solidFill>
+                <a:latin typeface="Arial"/>
+                <a:cs typeface="Arial"/>
+              </a:rPr>
+              <a:t>3 of 24</a:t>
+            </a:r>
+          </a:p>
+          <a:p>
+            <a:pPr algn="ctr"/>
+            <a:r>
+              <a:rPr lang="en-US" altLang="ko-KR" dirty="0" sz="650">
+                <a:solidFill>
+                  <a:srgbClr val="404040"/>
+                </a:solidFill>
+                <a:latin typeface="Arial"/>
+                <a:cs typeface="Arial"/>
+              </a:rPr>
+              <a:t>nodes skipped</a:t>
+            </a:r>
+          </a:p>
+        </p:txBody>
+      </p:sp>
+      <p:sp>
+        <p:nvSpPr>
+          <p:cNvPr id="409" name="Added box 409"/>
+          <p:cNvSpPr/>
+          <p:nvPr/>
+        </p:nvSpPr>
+        <p:spPr>
+          <a:xfrm>
+            <a:off x="8503920" y="3566160"/>
+            <a:ext cx="1207008" cy="502920"/>
+          </a:xfrm>
+          <a:prstGeom prst="roundRect">
+            <a:avLst>
+              <a:gd name="adj" fmla="val 12000"/>
+            </a:avLst>
+          </a:prstGeom>
+          <a:solidFill>
+            <a:srgbClr val="F2F2F2"/>
+          </a:solidFill>
+          <a:ln w="6350">
+            <a:solidFill>
+              <a:srgbClr val="BFBFBF"/>
+            </a:solidFill>
+          </a:ln>
+        </p:spPr>
+        <p:txBody>
+          <a:bodyPr wrap="square" lIns="36000" tIns="18000" rIns="36000" bIns="18000" anchor="ctr"/>
+          <a:lstStyle/>
+          <a:p>
+            <a:pPr algn="ctr"/>
+            <a:r>
+              <a:rPr lang="en-US" altLang="ko-KR" dirty="0" sz="1100" b="1">
+                <a:solidFill>
+                  <a:srgbClr val="404040"/>
+                </a:solidFill>
+                <a:latin typeface="Arial"/>
+                <a:cs typeface="Arial"/>
+              </a:rPr>
+              <a:t>21</a:t>
+            </a:r>
+          </a:p>
+          <a:p>
+            <a:pPr algn="ctr"/>
+            <a:r>
+              <a:rPr lang="en-US" altLang="ko-KR" dirty="0" sz="650">
+                <a:solidFill>
+                  <a:srgbClr val="404040"/>
+                </a:solidFill>
+                <a:latin typeface="Arial"/>
+                <a:cs typeface="Arial"/>
+              </a:rPr>
+              <a:t>nodes run as usual</a:t>
+            </a:r>
+          </a:p>
+        </p:txBody>
+      </p:sp>
+      <p:sp>
+        <p:nvSpPr>
+          <p:cNvPr id="410" name="Added box 410"/>
           <p:cNvSpPr/>
           <p:nvPr/>
         </p:nvSpPr>
@@ -10205,7 +8958,7 @@
       </p:sp>
       <p:sp>
         <p:nvSpPr>
-          <p:cNvPr id="406" name="Added box 406"/>
+          <p:cNvPr id="411" name="Added box 411"/>
           <p:cNvSpPr/>
           <p:nvPr/>
         </p:nvSpPr>
@@ -10248,7 +9001,7 @@
       </p:sp>
       <p:cxnSp>
         <p:nvCxnSpPr>
-          <p:cNvPr id="407" name="Arrow 407"/>
+          <p:cNvPr id="412" name="Arrow 412"/>
           <p:cNvCxnSpPr/>
           <p:nvPr/>
         </p:nvCxnSpPr>
@@ -10270,7 +9023,7 @@
       </p:cxnSp>
       <p:sp>
         <p:nvSpPr>
-          <p:cNvPr id="408" name="Added box 408"/>
+          <p:cNvPr id="413" name="Added box 413"/>
           <p:cNvSpPr/>
           <p:nvPr/>
         </p:nvSpPr>
@@ -10324,7 +9077,7 @@
       </p:sp>
       <p:cxnSp>
         <p:nvCxnSpPr>
-          <p:cNvPr id="409" name="Arrow 409"/>
+          <p:cNvPr id="414" name="Arrow 414"/>
           <p:cNvCxnSpPr/>
           <p:nvPr/>
         </p:nvCxnSpPr>
@@ -10346,7 +9099,7 @@
       </p:cxnSp>
       <p:sp>
         <p:nvSpPr>
-          <p:cNvPr id="410" name="Added box 410"/>
+          <p:cNvPr id="415" name="Added box 415"/>
           <p:cNvSpPr/>
           <p:nvPr/>
         </p:nvSpPr>
@@ -10402,7 +9155,7 @@
       </p:sp>
       <p:cxnSp>
         <p:nvCxnSpPr>
-          <p:cNvPr id="411" name="Arrow 411"/>
+          <p:cNvPr id="416" name="Arrow 416"/>
           <p:cNvCxnSpPr/>
           <p:nvPr/>
         </p:nvCxnSpPr>
@@ -10424,7 +9177,7 @@
       </p:cxnSp>
       <p:sp>
         <p:nvSpPr>
-          <p:cNvPr id="412" name="Added box 412"/>
+          <p:cNvPr id="417" name="Added box 417"/>
           <p:cNvSpPr/>
           <p:nvPr/>
         </p:nvSpPr>
@@ -10480,7 +9233,7 @@
       </p:sp>
       <p:cxnSp>
         <p:nvCxnSpPr>
-          <p:cNvPr id="413" name="Arrow 413"/>
+          <p:cNvPr id="418" name="Arrow 418"/>
           <p:cNvCxnSpPr/>
           <p:nvPr/>
         </p:nvCxnSpPr>
@@ -10502,7 +9255,7 @@
       </p:cxnSp>
       <p:sp>
         <p:nvSpPr>
-          <p:cNvPr id="414" name="Added box 414"/>
+          <p:cNvPr id="419" name="Added box 419"/>
           <p:cNvSpPr/>
           <p:nvPr/>
         </p:nvSpPr>
@@ -10543,7 +9296,7 @@
       </p:sp>
       <p:sp>
         <p:nvSpPr>
-          <p:cNvPr id="415" name="Added box 415"/>
+          <p:cNvPr id="420" name="Added box 420"/>
           <p:cNvSpPr/>
           <p:nvPr/>
         </p:nvSpPr>
@@ -10592,7 +9345,7 @@
                 <a:latin typeface="Arial"/>
                 <a:cs typeface="Arial"/>
               </a:rPr>
-              <a:t>Confirm the trend with a full week of data and update the ideal TC used by the dashboards.</a:t>
+              <a:t>Formal release on Line 2, then compare output and stop time before vs after.</a:t>
             </a:r>
           </a:p>
         </p:txBody>

--- a/lotform/TPM_1_Reinicio_Rapido.pptx
+++ b/lotform/TPM_1_Reinicio_Rapido.pptx
@@ -197,7 +197,7 @@
           <a:p>
             <a:fld id="{CC56EB0B-3736-454C-BDC9-CFE6B03A8AAF}" type="datetimeFigureOut">
               <a:rPr lang="ko-KR" altLang="en-US" smtClean="0"/>
-              <a:t>2026-09-18</a:t>
+              <a:t>2026-10-05</a:t>
             </a:fld>
             <a:endParaRPr lang="ko-KR" altLang="en-US"/>
           </a:p>
@@ -2304,7 +2304,7 @@
               <a:defRPr/>
             </a:pPr>
             <a:r>
-              <a:rPr lang="en-US" altLang="ko-KR" sz="1800" b="1" spc="-30" dirty="0" smtClean="0">
+              <a:rPr lang="en-US" altLang="ko-KR" sz="1800" b="1" spc="-30" dirty="0">
                 <a:solidFill>
                   <a:prstClr val="black"/>
                 </a:solidFill>
@@ -2381,7 +2381,7 @@
               <a:defRPr/>
             </a:pPr>
             <a:r>
-              <a:rPr lang="en-US" altLang="ko-KR" sz="1600" dirty="0" smtClean="0">
+              <a:rPr lang="en-US" altLang="ko-KR" sz="1600" dirty="0">
                 <a:solidFill>
                   <a:schemeClr val="tx1"/>
                 </a:solidFill>
@@ -2808,7 +2808,7 @@
               <a:defRPr/>
             </a:pPr>
             <a:r>
-              <a:rPr kumimoji="1" lang="es-419" altLang="ko-KR" sz="1300" b="1" i="0" u="none" strike="noStrike" kern="1200" cap="none" spc="-50" normalizeH="0" baseline="0" noProof="0" dirty="0" smtClean="0">
+              <a:rPr kumimoji="1" lang="es-419" altLang="ko-KR" sz="1300" b="1" i="0" u="none" strike="noStrike" kern="1200" cap="none" spc="-50" normalizeH="0" baseline="0" noProof="0" dirty="0">
                 <a:ln>
                   <a:noFill/>
                 </a:ln>
@@ -3159,12 +3159,12 @@
               <a:buNone/>
             </a:pPr>
             <a:r>
-              <a:rPr lang="en-US" altLang="ko-KR" dirty="0" sz="1400" b="1"/>
+              <a:rPr lang="en-US" altLang="ko-KR" sz="1400" b="1" dirty="0"/>
               <a:t>EFFECT:</a:t>
             </a:r>
           </a:p>
           <a:p>
-            <a:pPr algn="l" marL="171450" indent="-171450">
+            <a:pPr marL="171450" indent="-171450" algn="l">
               <a:spcAft>
                 <a:spcPts val="200"/>
               </a:spcAft>
@@ -3172,7 +3172,7 @@
               <a:buChar char="•"/>
             </a:pPr>
             <a:r>
-              <a:rPr lang="en-US" altLang="ko-KR" dirty="0" sz="1000"/>
+              <a:rPr lang="en-US" altLang="ko-KR" sz="1000" dirty="0"/>
               <a:t>Restart after a stop: 2.5-3 min → 10-15 s (-90%+) on 7 stations.</a:t>
             </a:r>
           </a:p>
@@ -4056,7 +4056,7 @@
         </p:nvGraphicFramePr>
         <p:xfrm>
           <a:off x="8807451" y="560208"/>
-          <a:ext cx="1012827" cy="950688"/>
+          <a:ext cx="1012827" cy="874488"/>
         </p:xfrm>
         <a:graphic>
           <a:graphicData uri="http://schemas.openxmlformats.org/drawingml/2006/table">
@@ -7470,7 +7470,7 @@
               <a:t> </a:t>
             </a:r>
             <a:r>
-              <a:rPr kumimoji="1" lang="es-419" altLang="ko-KR" sz="1300" b="1" i="0" u="none" strike="noStrike" kern="1200" cap="none" spc="0" normalizeH="0" baseline="0" noProof="0" dirty="0" smtClean="0">
+              <a:rPr kumimoji="1" lang="es-419" altLang="ko-KR" sz="1300" b="1" i="0" u="none" strike="noStrike" kern="1200" cap="none" spc="0" normalizeH="0" baseline="0" noProof="0" dirty="0">
                 <a:ln>
                   <a:noFill/>
                 </a:ln>
@@ -7950,30 +7950,6 @@
               </a:rPr>
               <a:t>Bottom Station has a restart feature, but it relies on a RestartProcess() method that the AcuraLibrary.dll of these stations does not declare.</a:t>
             </a:r>
-            <a:r>
-              <a:rPr lang="en-US" altLang="ko-KR" sz="1100" dirty="0" err="1">
-                <a:solidFill>
-                  <a:prstClr val="black"/>
-                </a:solidFill>
-                <a:latin typeface="LG스마트체 Regular" panose="020B0600000101010101" pitchFamily="50" charset="-127"/>
-                <a:ea typeface="LG스마트체 Regular" panose="020B0600000101010101" pitchFamily="50" charset="-127"/>
-                <a:cs typeface="Arial" panose="020B0604020202020204" pitchFamily="34" charset="0"/>
-                <a:sym typeface="Wingdings" pitchFamily="2" charset="2"/>
-              </a:rPr>
-              <a:t/>
-            </a:r>
-            <a:r>
-              <a:rPr lang="en-US" altLang="ko-KR" sz="1100" dirty="0">
-                <a:solidFill>
-                  <a:prstClr val="black"/>
-                </a:solidFill>
-                <a:latin typeface="LG스마트체 Regular" panose="020B0600000101010101" pitchFamily="50" charset="-127"/>
-                <a:ea typeface="LG스마트체 Regular" panose="020B0600000101010101" pitchFamily="50" charset="-127"/>
-                <a:cs typeface="Arial" panose="020B0604020202020204" pitchFamily="34" charset="0"/>
-                <a:sym typeface="Wingdings" pitchFamily="2" charset="2"/>
-              </a:rPr>
-              <a:t/>
-            </a:r>
           </a:p>
         </p:txBody>
       </p:sp>
@@ -8031,14 +8007,14 @@
               <a:t>18</a:t>
             </a:r>
             <a:r>
-              <a:rPr lang="en-US" altLang="ko-KR" sz="1000" b="1" spc="-29" dirty="0" smtClean="0">
+              <a:rPr lang="en-US" altLang="ko-KR" sz="1000" b="1" spc="-29" dirty="0">
                 <a:latin typeface="Arial Narrow" panose="020B0606020202030204" pitchFamily="34" charset="0"/>
                 <a:ea typeface="LG스마트체 Regular" panose="020B0600000101010101" pitchFamily="50" charset="-127"/>
               </a:rPr>
               <a:t>/09/2026</a:t>
             </a:r>
             <a:r>
-              <a:rPr lang="ko-KR" altLang="en-US" sz="1000" b="1" spc="-29" dirty="0" smtClean="0">
+              <a:rPr lang="ko-KR" altLang="en-US" sz="1000" b="1" spc="-29" dirty="0">
                 <a:latin typeface="Arial Narrow" panose="020B0606020202030204" pitchFamily="34" charset="0"/>
                 <a:ea typeface="LG스마트체 Regular" panose="020B0600000101010101" pitchFamily="50" charset="-127"/>
               </a:rPr>
@@ -8279,12 +8255,12 @@
               <a:buNone/>
             </a:pPr>
             <a:r>
-              <a:rPr lang="en-US" altLang="ko-KR" dirty="0" sz="1400" b="1"/>
+              <a:rPr lang="en-US" altLang="ko-KR" sz="1400" b="1" dirty="0"/>
               <a:t>IMPACT:</a:t>
             </a:r>
           </a:p>
           <a:p>
-            <a:pPr algn="l" marL="171450" indent="-171450">
+            <a:pPr marL="171450" indent="-171450" algn="l">
               <a:spcAft>
                 <a:spcPts val="300"/>
               </a:spcAft>
@@ -8292,12 +8268,12 @@
               <a:buChar char="•"/>
             </a:pPr>
             <a:r>
-              <a:rPr lang="en-US" altLang="ko-KR" dirty="0" sz="900"/>
+              <a:rPr lang="en-US" altLang="ko-KR" sz="900" dirty="0"/>
               <a:t>2 Oct: 20,127 pcs (+20.7% vs 12 Aug) with no stop hours.</a:t>
             </a:r>
           </a:p>
           <a:p>
-            <a:pPr algn="l" marL="171450" indent="-171450">
+            <a:pPr marL="171450" indent="-171450" algn="l">
               <a:spcAft>
                 <a:spcPts val="300"/>
               </a:spcAft>
@@ -8305,12 +8281,12 @@
               <a:buChar char="•"/>
             </a:pPr>
             <a:r>
-              <a:rPr lang="en-US" altLang="ko-KR" dirty="0" sz="900"/>
+              <a:rPr lang="en-US" altLang="ko-KR" sz="900" dirty="0"/>
               <a:t>1 Oct: controlled material run (17,449 pcs), yet the best hour of all: 1,003 pcs.</a:t>
             </a:r>
           </a:p>
           <a:p>
-            <a:pPr algn="l" marL="171450" indent="-171450">
+            <a:pPr marL="171450" indent="-171450" algn="l">
               <a:spcAft>
                 <a:spcPts val="300"/>
               </a:spcAft>
@@ -8318,7 +8294,7 @@
               <a:buChar char="•"/>
             </a:pPr>
             <a:r>
-              <a:rPr lang="en-US" altLang="ko-KR" dirty="0" sz="900"/>
+              <a:rPr lang="en-US" altLang="ko-KR" sz="900" dirty="0"/>
               <a:t>Replicable to any station on the same SDK, ~30 min each.</a:t>
             </a:r>
           </a:p>
@@ -8413,11 +8389,41 @@
             <a:tbl>
               <a:tblPr firstRow="1"/>
               <a:tblGrid>
-                <a:gridCol w="804672"/>
-                <a:gridCol w="429768"/>
-                <a:gridCol w="429768"/>
-                <a:gridCol w="457200"/>
-                <a:gridCol w="457200"/>
+                <a:gridCol w="804672">
+                  <a:extLst>
+                    <a:ext uri="{9D8B030D-6E8A-4147-A177-3AD203B41FA5}">
+                      <a16:colId xmlns:a16="http://schemas.microsoft.com/office/drawing/2014/main" val="20000"/>
+                    </a:ext>
+                  </a:extLst>
+                </a:gridCol>
+                <a:gridCol w="429768">
+                  <a:extLst>
+                    <a:ext uri="{9D8B030D-6E8A-4147-A177-3AD203B41FA5}">
+                      <a16:colId xmlns:a16="http://schemas.microsoft.com/office/drawing/2014/main" val="20001"/>
+                    </a:ext>
+                  </a:extLst>
+                </a:gridCol>
+                <a:gridCol w="429768">
+                  <a:extLst>
+                    <a:ext uri="{9D8B030D-6E8A-4147-A177-3AD203B41FA5}">
+                      <a16:colId xmlns:a16="http://schemas.microsoft.com/office/drawing/2014/main" val="20002"/>
+                    </a:ext>
+                  </a:extLst>
+                </a:gridCol>
+                <a:gridCol w="457200">
+                  <a:extLst>
+                    <a:ext uri="{9D8B030D-6E8A-4147-A177-3AD203B41FA5}">
+                      <a16:colId xmlns:a16="http://schemas.microsoft.com/office/drawing/2014/main" val="20003"/>
+                    </a:ext>
+                  </a:extLst>
+                </a:gridCol>
+                <a:gridCol w="457200">
+                  <a:extLst>
+                    <a:ext uri="{9D8B030D-6E8A-4147-A177-3AD203B41FA5}">
+                      <a16:colId xmlns:a16="http://schemas.microsoft.com/office/drawing/2014/main" val="20004"/>
+                    </a:ext>
+                  </a:extLst>
+                </a:gridCol>
               </a:tblGrid>
               <a:tr h="173736">
                 <a:tc>
@@ -8427,7 +8433,7 @@
                     <a:p>
                       <a:pPr algn="ctr"/>
                       <a:r>
-                        <a:rPr lang="en-US" altLang="ko-KR" dirty="0" sz="700" b="1">
+                        <a:rPr lang="en-US" altLang="ko-KR" sz="700" b="1" dirty="0">
                           <a:solidFill>
                             <a:srgbClr val="FFFFFF"/>
                           </a:solidFill>
@@ -8471,7 +8477,7 @@
                     <a:p>
                       <a:pPr algn="ctr"/>
                       <a:r>
-                        <a:rPr lang="en-US" altLang="ko-KR" dirty="0" sz="700" b="1">
+                        <a:rPr lang="en-US" altLang="ko-KR" sz="700" b="1" dirty="0">
                           <a:solidFill>
                             <a:srgbClr val="FFFFFF"/>
                           </a:solidFill>
@@ -8515,7 +8521,7 @@
                     <a:p>
                       <a:pPr algn="ctr"/>
                       <a:r>
-                        <a:rPr lang="en-US" altLang="ko-KR" dirty="0" sz="700" b="1">
+                        <a:rPr lang="en-US" altLang="ko-KR" sz="700" b="1" dirty="0">
                           <a:solidFill>
                             <a:srgbClr val="FFFFFF"/>
                           </a:solidFill>
@@ -8559,7 +8565,7 @@
                     <a:p>
                       <a:pPr algn="ctr"/>
                       <a:r>
-                        <a:rPr lang="en-US" altLang="ko-KR" dirty="0" sz="700" b="1">
+                        <a:rPr lang="en-US" altLang="ko-KR" sz="700" b="1" dirty="0">
                           <a:solidFill>
                             <a:srgbClr val="FFFFFF"/>
                           </a:solidFill>
@@ -8603,7 +8609,7 @@
                     <a:p>
                       <a:pPr algn="ctr"/>
                       <a:r>
-                        <a:rPr lang="en-US" altLang="ko-KR" dirty="0" sz="700" b="1">
+                        <a:rPr lang="en-US" altLang="ko-KR" sz="700" b="1" dirty="0">
                           <a:solidFill>
                             <a:srgbClr val="FFFFFF"/>
                           </a:solidFill>
@@ -8640,6 +8646,11 @@
                     </a:solidFill>
                   </a:tcPr>
                 </a:tc>
+                <a:extLst>
+                  <a:ext uri="{0D108BD9-81ED-4DB2-BD59-A6C34878D82A}">
+                    <a16:rowId xmlns:a16="http://schemas.microsoft.com/office/drawing/2014/main" val="10000"/>
+                  </a:ext>
+                </a:extLst>
               </a:tr>
               <a:tr h="173736">
                 <a:tc>
@@ -8649,7 +8660,7 @@
                     <a:p>
                       <a:pPr algn="l"/>
                       <a:r>
-                        <a:rPr lang="en-US" altLang="ko-KR" dirty="0" sz="700">
+                        <a:rPr lang="en-US" altLang="ko-KR" sz="700" dirty="0">
                           <a:solidFill>
                             <a:srgbClr val="262626"/>
                           </a:solidFill>
@@ -8693,7 +8704,7 @@
                     <a:p>
                       <a:pPr algn="ctr"/>
                       <a:r>
-                        <a:rPr lang="en-US" altLang="ko-KR" dirty="0" sz="700">
+                        <a:rPr lang="en-US" altLang="ko-KR" sz="700" dirty="0">
                           <a:solidFill>
                             <a:srgbClr val="262626"/>
                           </a:solidFill>
@@ -8734,7 +8745,7 @@
                     <a:p>
                       <a:pPr algn="ctr"/>
                       <a:r>
-                        <a:rPr lang="en-US" altLang="ko-KR" dirty="0" sz="700">
+                        <a:rPr lang="en-US" altLang="ko-KR" sz="700" dirty="0">
                           <a:solidFill>
                             <a:srgbClr val="262626"/>
                           </a:solidFill>
@@ -8775,7 +8786,7 @@
                     <a:p>
                       <a:pPr algn="ctr"/>
                       <a:r>
-                        <a:rPr lang="en-US" altLang="ko-KR" dirty="0" sz="700" b="1">
+                        <a:rPr lang="en-US" altLang="ko-KR" sz="700" b="1" dirty="0">
                           <a:solidFill>
                             <a:srgbClr val="262626"/>
                           </a:solidFill>
@@ -8819,7 +8830,7 @@
                     <a:p>
                       <a:pPr algn="ctr"/>
                       <a:r>
-                        <a:rPr lang="en-US" altLang="ko-KR" dirty="0" sz="700" b="1">
+                        <a:rPr lang="en-US" altLang="ko-KR" sz="700" b="1" dirty="0">
                           <a:solidFill>
                             <a:srgbClr val="00703C"/>
                           </a:solidFill>
@@ -8853,6 +8864,11 @@
                     </a:lnB>
                   </a:tcPr>
                 </a:tc>
+                <a:extLst>
+                  <a:ext uri="{0D108BD9-81ED-4DB2-BD59-A6C34878D82A}">
+                    <a16:rowId xmlns:a16="http://schemas.microsoft.com/office/drawing/2014/main" val="10001"/>
+                  </a:ext>
+                </a:extLst>
               </a:tr>
               <a:tr h="173736">
                 <a:tc>
@@ -8862,7 +8878,7 @@
                     <a:p>
                       <a:pPr algn="l"/>
                       <a:r>
-                        <a:rPr lang="en-US" altLang="ko-KR" dirty="0" sz="700">
+                        <a:rPr lang="en-US" altLang="ko-KR" sz="700" dirty="0">
                           <a:solidFill>
                             <a:srgbClr val="262626"/>
                           </a:solidFill>
@@ -8906,7 +8922,7 @@
                     <a:p>
                       <a:pPr algn="ctr"/>
                       <a:r>
-                        <a:rPr lang="en-US" altLang="ko-KR" dirty="0" sz="700">
+                        <a:rPr lang="en-US" altLang="ko-KR" sz="700" dirty="0">
                           <a:solidFill>
                             <a:srgbClr val="262626"/>
                           </a:solidFill>
@@ -8947,7 +8963,7 @@
                     <a:p>
                       <a:pPr algn="ctr"/>
                       <a:r>
-                        <a:rPr lang="en-US" altLang="ko-KR" dirty="0" sz="700">
+                        <a:rPr lang="en-US" altLang="ko-KR" sz="700" dirty="0">
                           <a:solidFill>
                             <a:srgbClr val="262626"/>
                           </a:solidFill>
@@ -8988,7 +9004,7 @@
                     <a:p>
                       <a:pPr algn="ctr"/>
                       <a:r>
-                        <a:rPr lang="en-US" altLang="ko-KR" dirty="0" sz="700" b="1">
+                        <a:rPr lang="en-US" altLang="ko-KR" sz="700" b="1" dirty="0">
                           <a:solidFill>
                             <a:srgbClr val="262626"/>
                           </a:solidFill>
@@ -9032,7 +9048,7 @@
                     <a:p>
                       <a:pPr algn="ctr"/>
                       <a:r>
-                        <a:rPr lang="en-US" altLang="ko-KR" dirty="0" sz="700" b="1">
+                        <a:rPr lang="en-US" altLang="ko-KR" sz="700" b="1" dirty="0">
                           <a:solidFill>
                             <a:srgbClr val="00703C"/>
                           </a:solidFill>
@@ -9066,6 +9082,11 @@
                     </a:lnB>
                   </a:tcPr>
                 </a:tc>
+                <a:extLst>
+                  <a:ext uri="{0D108BD9-81ED-4DB2-BD59-A6C34878D82A}">
+                    <a16:rowId xmlns:a16="http://schemas.microsoft.com/office/drawing/2014/main" val="10002"/>
+                  </a:ext>
+                </a:extLst>
               </a:tr>
               <a:tr h="173736">
                 <a:tc>
@@ -9075,7 +9096,7 @@
                     <a:p>
                       <a:pPr algn="l"/>
                       <a:r>
-                        <a:rPr lang="en-US" altLang="ko-KR" dirty="0" sz="700">
+                        <a:rPr lang="en-US" altLang="ko-KR" sz="700" dirty="0">
                           <a:solidFill>
                             <a:srgbClr val="262626"/>
                           </a:solidFill>
@@ -9119,7 +9140,7 @@
                     <a:p>
                       <a:pPr algn="ctr"/>
                       <a:r>
-                        <a:rPr lang="en-US" altLang="ko-KR" dirty="0" sz="700">
+                        <a:rPr lang="en-US" altLang="ko-KR" sz="700" dirty="0">
                           <a:solidFill>
                             <a:srgbClr val="262626"/>
                           </a:solidFill>
@@ -9160,7 +9181,7 @@
                     <a:p>
                       <a:pPr algn="ctr"/>
                       <a:r>
-                        <a:rPr lang="en-US" altLang="ko-KR" dirty="0" sz="700">
+                        <a:rPr lang="en-US" altLang="ko-KR" sz="700" dirty="0">
                           <a:solidFill>
                             <a:srgbClr val="262626"/>
                           </a:solidFill>
@@ -9201,7 +9222,7 @@
                     <a:p>
                       <a:pPr algn="ctr"/>
                       <a:r>
-                        <a:rPr lang="en-US" altLang="ko-KR" dirty="0" sz="700" b="1">
+                        <a:rPr lang="en-US" altLang="ko-KR" sz="700" b="1" dirty="0">
                           <a:solidFill>
                             <a:srgbClr val="262626"/>
                           </a:solidFill>
@@ -9245,7 +9266,7 @@
                     <a:p>
                       <a:pPr algn="ctr"/>
                       <a:r>
-                        <a:rPr lang="en-US" altLang="ko-KR" dirty="0" sz="700" b="1">
+                        <a:rPr lang="en-US" altLang="ko-KR" sz="700" b="1" dirty="0">
                           <a:solidFill>
                             <a:srgbClr val="00703C"/>
                           </a:solidFill>
@@ -9279,6 +9300,11 @@
                     </a:lnB>
                   </a:tcPr>
                 </a:tc>
+                <a:extLst>
+                  <a:ext uri="{0D108BD9-81ED-4DB2-BD59-A6C34878D82A}">
+                    <a16:rowId xmlns:a16="http://schemas.microsoft.com/office/drawing/2014/main" val="10003"/>
+                  </a:ext>
+                </a:extLst>
               </a:tr>
               <a:tr h="173736">
                 <a:tc>
@@ -9288,7 +9314,7 @@
                     <a:p>
                       <a:pPr algn="l"/>
                       <a:r>
-                        <a:rPr lang="en-US" altLang="ko-KR" dirty="0" sz="700">
+                        <a:rPr lang="en-US" altLang="ko-KR" sz="700" dirty="0">
                           <a:solidFill>
                             <a:srgbClr val="262626"/>
                           </a:solidFill>
@@ -9332,7 +9358,7 @@
                     <a:p>
                       <a:pPr algn="ctr"/>
                       <a:r>
-                        <a:rPr lang="en-US" altLang="ko-KR" dirty="0" sz="700">
+                        <a:rPr lang="en-US" altLang="ko-KR" sz="700" dirty="0">
                           <a:solidFill>
                             <a:srgbClr val="262626"/>
                           </a:solidFill>
@@ -9373,7 +9399,7 @@
                     <a:p>
                       <a:pPr algn="ctr"/>
                       <a:r>
-                        <a:rPr lang="en-US" altLang="ko-KR" dirty="0" sz="700">
+                        <a:rPr lang="en-US" altLang="ko-KR" sz="700" dirty="0">
                           <a:solidFill>
                             <a:srgbClr val="262626"/>
                           </a:solidFill>
@@ -9414,7 +9440,7 @@
                     <a:p>
                       <a:pPr algn="ctr"/>
                       <a:r>
-                        <a:rPr lang="en-US" altLang="ko-KR" dirty="0" sz="700" b="1">
+                        <a:rPr lang="en-US" altLang="ko-KR" sz="700" b="1" dirty="0">
                           <a:solidFill>
                             <a:srgbClr val="262626"/>
                           </a:solidFill>
@@ -9458,7 +9484,7 @@
                     <a:p>
                       <a:pPr algn="ctr"/>
                       <a:r>
-                        <a:rPr lang="en-US" altLang="ko-KR" dirty="0" sz="700" b="1">
+                        <a:rPr lang="en-US" altLang="ko-KR" sz="700" b="1" dirty="0">
                           <a:solidFill>
                             <a:srgbClr val="00703C"/>
                           </a:solidFill>
@@ -9492,6 +9518,11 @@
                     </a:lnB>
                   </a:tcPr>
                 </a:tc>
+                <a:extLst>
+                  <a:ext uri="{0D108BD9-81ED-4DB2-BD59-A6C34878D82A}">
+                    <a16:rowId xmlns:a16="http://schemas.microsoft.com/office/drawing/2014/main" val="10004"/>
+                  </a:ext>
+                </a:extLst>
               </a:tr>
               <a:tr h="173736">
                 <a:tc>
@@ -9501,7 +9532,7 @@
                     <a:p>
                       <a:pPr algn="l"/>
                       <a:r>
-                        <a:rPr lang="en-US" altLang="ko-KR" dirty="0" sz="700">
+                        <a:rPr lang="en-US" altLang="ko-KR" sz="700" dirty="0">
                           <a:solidFill>
                             <a:srgbClr val="262626"/>
                           </a:solidFill>
@@ -9545,7 +9576,7 @@
                     <a:p>
                       <a:pPr algn="ctr"/>
                       <a:r>
-                        <a:rPr lang="en-US" altLang="ko-KR" dirty="0" sz="700">
+                        <a:rPr lang="en-US" altLang="ko-KR" sz="700" dirty="0">
                           <a:solidFill>
                             <a:srgbClr val="262626"/>
                           </a:solidFill>
@@ -9586,7 +9617,7 @@
                     <a:p>
                       <a:pPr algn="ctr"/>
                       <a:r>
-                        <a:rPr lang="en-US" altLang="ko-KR" dirty="0" sz="700">
+                        <a:rPr lang="en-US" altLang="ko-KR" sz="700" dirty="0">
                           <a:solidFill>
                             <a:srgbClr val="262626"/>
                           </a:solidFill>
@@ -9627,7 +9658,7 @@
                     <a:p>
                       <a:pPr algn="ctr"/>
                       <a:r>
-                        <a:rPr lang="en-US" altLang="ko-KR" dirty="0" sz="700" b="1">
+                        <a:rPr lang="en-US" altLang="ko-KR" sz="700" b="1" dirty="0">
                           <a:solidFill>
                             <a:srgbClr val="262626"/>
                           </a:solidFill>
@@ -9671,7 +9702,7 @@
                     <a:p>
                       <a:pPr algn="ctr"/>
                       <a:r>
-                        <a:rPr lang="en-US" altLang="ko-KR" dirty="0" sz="700" b="1">
+                        <a:rPr lang="en-US" altLang="ko-KR" sz="700" b="1" dirty="0">
                           <a:solidFill>
                             <a:srgbClr val="00703C"/>
                           </a:solidFill>
@@ -9705,6 +9736,11 @@
                     </a:lnB>
                   </a:tcPr>
                 </a:tc>
+                <a:extLst>
+                  <a:ext uri="{0D108BD9-81ED-4DB2-BD59-A6C34878D82A}">
+                    <a16:rowId xmlns:a16="http://schemas.microsoft.com/office/drawing/2014/main" val="10005"/>
+                  </a:ext>
+                </a:extLst>
               </a:tr>
               <a:tr h="173736">
                 <a:tc>
@@ -9714,7 +9750,7 @@
                     <a:p>
                       <a:pPr algn="l"/>
                       <a:r>
-                        <a:rPr lang="en-US" altLang="ko-KR" dirty="0" sz="700">
+                        <a:rPr lang="en-US" altLang="ko-KR" sz="700" dirty="0">
                           <a:solidFill>
                             <a:srgbClr val="262626"/>
                           </a:solidFill>
@@ -9758,7 +9794,7 @@
                     <a:p>
                       <a:pPr algn="ctr"/>
                       <a:r>
-                        <a:rPr lang="en-US" altLang="ko-KR" dirty="0" sz="700">
+                        <a:rPr lang="en-US" altLang="ko-KR" sz="700" dirty="0">
                           <a:solidFill>
                             <a:srgbClr val="262626"/>
                           </a:solidFill>
@@ -9799,7 +9835,7 @@
                     <a:p>
                       <a:pPr algn="ctr"/>
                       <a:r>
-                        <a:rPr lang="en-US" altLang="ko-KR" dirty="0" sz="700">
+                        <a:rPr lang="en-US" altLang="ko-KR" sz="700" dirty="0">
                           <a:solidFill>
                             <a:srgbClr val="262626"/>
                           </a:solidFill>
@@ -9840,7 +9876,7 @@
                     <a:p>
                       <a:pPr algn="ctr"/>
                       <a:r>
-                        <a:rPr lang="en-US" altLang="ko-KR" dirty="0" sz="700" b="1">
+                        <a:rPr lang="en-US" altLang="ko-KR" sz="700" b="1" dirty="0">
                           <a:solidFill>
                             <a:srgbClr val="262626"/>
                           </a:solidFill>
@@ -9884,7 +9920,7 @@
                     <a:p>
                       <a:pPr algn="ctr"/>
                       <a:r>
-                        <a:rPr lang="en-US" altLang="ko-KR" dirty="0" sz="700" b="1">
+                        <a:rPr lang="en-US" altLang="ko-KR" sz="700" b="1" dirty="0">
                           <a:solidFill>
                             <a:srgbClr val="00703C"/>
                           </a:solidFill>
@@ -9918,6 +9954,11 @@
                     </a:lnB>
                   </a:tcPr>
                 </a:tc>
+                <a:extLst>
+                  <a:ext uri="{0D108BD9-81ED-4DB2-BD59-A6C34878D82A}">
+                    <a16:rowId xmlns:a16="http://schemas.microsoft.com/office/drawing/2014/main" val="10006"/>
+                  </a:ext>
+                </a:extLst>
               </a:tr>
             </a:tbl>
           </a:graphicData>
@@ -9947,7 +9988,7 @@
               <a:buNone/>
             </a:pPr>
             <a:r>
-              <a:rPr lang="en-US" altLang="ko-KR" dirty="0" sz="650">
+              <a:rPr lang="en-US" altLang="ko-KR" sz="650" dirty="0">
                 <a:solidFill>
                   <a:srgbClr val="7F7F7F"/>
                 </a:solidFill>
@@ -9984,7 +10025,7 @@
           <a:p>
             <a:pPr algn="l"/>
             <a:r>
-              <a:rPr lang="en-US" altLang="ko-KR" dirty="0" sz="800" b="1">
+              <a:rPr lang="en-US" altLang="ko-KR" sz="800" b="1" dirty="0">
                 <a:solidFill>
                   <a:srgbClr val="595959"/>
                 </a:solidFill>
@@ -10027,7 +10068,7 @@
           <a:p>
             <a:pPr algn="ctr"/>
             <a:r>
-              <a:rPr lang="en-US" altLang="ko-KR" dirty="0" sz="1100" b="1">
+              <a:rPr lang="en-US" altLang="ko-KR" sz="1100" b="1" dirty="0">
                 <a:solidFill>
                   <a:srgbClr val="A50034"/>
                 </a:solidFill>
@@ -10040,7 +10081,7 @@
           <a:p>
             <a:pPr algn="ctr"/>
             <a:r>
-              <a:rPr lang="en-US" altLang="ko-KR" dirty="0" sz="700">
+              <a:rPr lang="en-US" altLang="ko-KR" sz="700" dirty="0">
                 <a:solidFill>
                   <a:srgbClr val="404040"/>
                 </a:solidFill>
@@ -10083,7 +10124,7 @@
           <a:p>
             <a:pPr algn="ctr"/>
             <a:r>
-              <a:rPr lang="en-US" altLang="ko-KR" dirty="0" sz="1100" b="1">
+              <a:rPr lang="en-US" altLang="ko-KR" sz="1100" b="1" dirty="0">
                 <a:solidFill>
                   <a:srgbClr val="A50034"/>
                 </a:solidFill>
@@ -10096,7 +10137,7 @@
           <a:p>
             <a:pPr algn="ctr"/>
             <a:r>
-              <a:rPr lang="en-US" altLang="ko-KR" dirty="0" sz="700">
+              <a:rPr lang="en-US" altLang="ko-KR" sz="700" dirty="0">
                 <a:solidFill>
                   <a:srgbClr val="404040"/>
                 </a:solidFill>
@@ -10139,7 +10180,7 @@
           <a:p>
             <a:pPr algn="ctr"/>
             <a:r>
-              <a:rPr lang="en-US" altLang="ko-KR" dirty="0" sz="1100" b="1">
+              <a:rPr lang="en-US" altLang="ko-KR" sz="1100" b="1" dirty="0">
                 <a:solidFill>
                   <a:srgbClr val="404040"/>
                 </a:solidFill>
@@ -10152,7 +10193,7 @@
           <a:p>
             <a:pPr algn="ctr"/>
             <a:r>
-              <a:rPr lang="en-US" altLang="ko-KR" dirty="0" sz="700">
+              <a:rPr lang="en-US" altLang="ko-KR" sz="700" dirty="0">
                 <a:solidFill>
                   <a:srgbClr val="404040"/>
                 </a:solidFill>
@@ -10191,7 +10232,7 @@
           <a:p>
             <a:pPr algn="l"/>
             <a:r>
-              <a:rPr lang="en-US" altLang="ko-KR" dirty="0" sz="800" b="1">
+              <a:rPr lang="en-US" altLang="ko-KR" sz="800" b="1" dirty="0">
                 <a:solidFill>
                   <a:srgbClr val="595959"/>
                 </a:solidFill>
@@ -10234,7 +10275,7 @@
           <a:p>
             <a:pPr algn="ctr"/>
             <a:r>
-              <a:rPr lang="en-US" altLang="ko-KR" dirty="0" sz="800" b="1">
+              <a:rPr lang="en-US" altLang="ko-KR" sz="800" b="1" dirty="0">
                 <a:solidFill>
                   <a:srgbClr val="404040"/>
                 </a:solidFill>
@@ -10297,7 +10338,7 @@
           <a:p>
             <a:pPr algn="ctr"/>
             <a:r>
-              <a:rPr lang="en-US" altLang="ko-KR" dirty="0" sz="800" b="1">
+              <a:rPr lang="en-US" altLang="ko-KR" sz="800" b="1" dirty="0">
                 <a:solidFill>
                   <a:srgbClr val="FFFFFF"/>
                 </a:solidFill>
@@ -10310,7 +10351,7 @@
           <a:p>
             <a:pPr algn="ctr"/>
             <a:r>
-              <a:rPr lang="en-US" altLang="ko-KR" dirty="0" sz="700">
+              <a:rPr lang="en-US" altLang="ko-KR" sz="700" dirty="0">
                 <a:solidFill>
                   <a:srgbClr val="FFFFFF"/>
                 </a:solidFill>
@@ -10375,7 +10416,7 @@
           <a:p>
             <a:pPr algn="ctr"/>
             <a:r>
-              <a:rPr lang="en-US" altLang="ko-KR" dirty="0" sz="800" b="1">
+              <a:rPr lang="en-US" altLang="ko-KR" sz="800" b="1" dirty="0">
                 <a:solidFill>
                   <a:srgbClr val="404040"/>
                 </a:solidFill>
@@ -10388,7 +10429,7 @@
           <a:p>
             <a:pPr algn="ctr"/>
             <a:r>
-              <a:rPr lang="en-US" altLang="ko-KR" dirty="0" sz="650">
+              <a:rPr lang="en-US" altLang="ko-KR" sz="650" dirty="0">
                 <a:solidFill>
                   <a:srgbClr val="404040"/>
                 </a:solidFill>
@@ -10453,7 +10494,7 @@
           <a:p>
             <a:pPr algn="ctr"/>
             <a:r>
-              <a:rPr lang="en-US" altLang="ko-KR" dirty="0" sz="800" b="1">
+              <a:rPr lang="en-US" altLang="ko-KR" sz="800" b="1" dirty="0">
                 <a:solidFill>
                   <a:srgbClr val="404040"/>
                 </a:solidFill>
@@ -10466,7 +10507,7 @@
           <a:p>
             <a:pPr algn="ctr"/>
             <a:r>
-              <a:rPr lang="en-US" altLang="ko-KR" dirty="0" sz="650">
+              <a:rPr lang="en-US" altLang="ko-KR" sz="650" dirty="0">
                 <a:solidFill>
                   <a:srgbClr val="404040"/>
                 </a:solidFill>
@@ -10529,7 +10570,7 @@
           <a:p>
             <a:pPr algn="ctr"/>
             <a:r>
-              <a:rPr lang="en-US" altLang="ko-KR" dirty="0" sz="800" b="1">
+              <a:rPr lang="en-US" altLang="ko-KR" sz="800" b="1" dirty="0">
                 <a:solidFill>
                   <a:srgbClr val="FFFFFF"/>
                 </a:solidFill>
@@ -10537,62 +10578,6 @@
                 <a:cs typeface="Arial"/>
               </a:rPr>
               <a:t>Running in 10-15 s</a:t>
-            </a:r>
-          </a:p>
-        </p:txBody>
-      </p:sp>
-      <p:sp>
-        <p:nvSpPr>
-          <p:cNvPr id="415" name="Added box 415"/>
-          <p:cNvSpPr/>
-          <p:nvPr/>
-        </p:nvSpPr>
-        <p:spPr>
-          <a:xfrm>
-            <a:off x="7223760" y="5705856"/>
-            <a:ext cx="2523744" cy="438912"/>
-          </a:xfrm>
-          <a:prstGeom prst="roundRect">
-            <a:avLst>
-              <a:gd name="adj" fmla="val 12000"/>
-            </a:avLst>
-          </a:prstGeom>
-          <a:solidFill>
-            <a:srgbClr val="F2F2F2"/>
-          </a:solidFill>
-          <a:ln w="6350">
-            <a:solidFill>
-              <a:srgbClr val="BFBFBF"/>
-            </a:solidFill>
-          </a:ln>
-        </p:spPr>
-        <p:txBody>
-          <a:bodyPr wrap="square" lIns="36000" tIns="18000" rIns="36000" bIns="18000" anchor="ctr"/>
-          <a:lstStyle/>
-          <a:p>
-            <a:pPr algn="l"/>
-            <a:r>
-              <a:rPr lang="en-US" altLang="ko-KR" dirty="0" sz="800" b="1">
-                <a:solidFill>
-                  <a:srgbClr val="404040"/>
-                </a:solidFill>
-                <a:latin typeface="Arial"/>
-                <a:cs typeface="Arial"/>
-              </a:rPr>
-              <a:t>Next step</a:t>
-            </a:r>
-          </a:p>
-          <a:p>
-            <a:pPr algn="l"/>
-            <a:r>
-              <a:rPr lang="en-US" altLang="ko-KR" dirty="0" sz="700">
-                <a:solidFill>
-                  <a:srgbClr val="404040"/>
-                </a:solidFill>
-                <a:latin typeface="Arial"/>
-                <a:cs typeface="Arial"/>
-              </a:rPr>
-              <a:t>Confirm the trend with a full week of data and update the ideal TC used by the dashboards.</a:t>
             </a:r>
           </a:p>
         </p:txBody>
@@ -11188,4 +11173,10 @@
     </a:ext>
   </a:extLst>
 </a:theme>
+</file>
+
+<file path=docMetadata/LabelInfo.xml><?xml version="1.0" encoding="utf-8"?>
+<clbl:labelList xmlns:clbl="http://schemas.microsoft.com/office/2020/mipLabelMetadata">
+  <clbl:label id="{99b8a968-831d-4cfc-b1f9-4367a1331151}" enabled="1" method="Privileged" siteId="{e6c7989d-a5fe-4b7b-a335-3288406db2fd}" contentBits="3" removed="0"/>
+</clbl:labelList>
 </file>